--- a/assets/templates/bioinformatics-pipeline/a0-landscape/template.pptx
+++ b/assets/templates/bioinformatics-pipeline/a0-landscape/template.pptx
@@ -2,13 +2,13 @@
 <file path=ppt/presentation.xml><?xml version="1.0" encoding="utf-8"?>
 <p:presentation xmlns:p="http://schemas.openxmlformats.org/presentationml/2006/main">
   <p:sldMasterIdLst>
-    <p:sldMasterId xmlns:r="http://schemas.openxmlformats.org/officeDocument/2006/relationships" id="2147483648" r:id="Rc7313914108c4f0a"/>
+    <p:sldMasterId xmlns:r="http://schemas.openxmlformats.org/officeDocument/2006/relationships" id="2147483648" r:id="R5408a67400824c27"/>
   </p:sldMasterIdLst>
   <p:notesMasterIdLst>
-    <p:notesMasterId xmlns:r="http://schemas.openxmlformats.org/officeDocument/2006/relationships" r:id="R9be4877268534c82"/>
+    <p:notesMasterId xmlns:r="http://schemas.openxmlformats.org/officeDocument/2006/relationships" r:id="Rf40db608368f4b02"/>
   </p:notesMasterIdLst>
   <p:sldIdLst>
-    <p:sldId xmlns:r="http://schemas.openxmlformats.org/officeDocument/2006/relationships" id="256" r:id="Re16ff08079184fa2"/>
+    <p:sldId xmlns:r="http://schemas.openxmlformats.org/officeDocument/2006/relationships" id="256" r:id="R3a91c512838b4908"/>
   </p:sldIdLst>
   <p:sldSz cx="42805350" cy="30279975"/>
   <p:notesSz cx="6858000" cy="9144000"/>
@@ -525,7 +525,7 @@
   </p:cSld>
   <p:clrMap bg1="lt1" tx1="dk1" bg2="lt2" tx2="dk2" accent1="accent1" accent2="accent2" accent3="accent3" accent4="accent4" accent5="accent5" accent6="accent6" hlink="hlink" folHlink="folHlink"/>
   <p:sldLayoutIdLst>
-    <p:sldLayoutId xmlns:r="http://schemas.openxmlformats.org/officeDocument/2006/relationships" id="2147483649" r:id="Ra05d98f675974cc3"/>
+    <p:sldLayoutId xmlns:r="http://schemas.openxmlformats.org/officeDocument/2006/relationships" id="2147483649" r:id="R258730d02d8a4098"/>
   </p:sldLayoutIdLst>
   <p:txStyles>
     <p:titleStyle>
@@ -1073,10 +1073,10 @@
       </p:grpSpPr>
       <p:sp>
         <p:nvSpPr>
-          <p:cNvPr id="92" name="header-band">
-            <a:extLst xmlns:a="http://schemas.openxmlformats.org/drawingml/2006/main">
-              <a:ext uri="{FF2B5EF4-FFF2-40B4-BE49-F238E27FC236}">
-                <a16:creationId xmlns:a16="http://schemas.microsoft.com/office/drawing/2014/main" id="{B943E98F-5F2D-4D93-AD6A-1BDC96993776}"/>
+          <p:cNvPr id="93" name="header-band">
+            <a:extLst xmlns:a="http://schemas.openxmlformats.org/drawingml/2006/main">
+              <a:ext uri="{FF2B5EF4-FFF2-40B4-BE49-F238E27FC236}">
+                <a16:creationId xmlns:a16="http://schemas.microsoft.com/office/drawing/2014/main" id="{71E08EFF-B9A2-442B-96F2-692478CEAC26}"/>
               </a:ext>
             </a:extLst>
           </p:cNvPr>
@@ -1109,7 +1109,7 @@
           <p:cNvPr id="2" name="top-accent">
             <a:extLst xmlns:a="http://schemas.openxmlformats.org/drawingml/2006/main">
               <a:ext uri="{FF2B5EF4-FFF2-40B4-BE49-F238E27FC236}">
-                <a16:creationId xmlns:a16="http://schemas.microsoft.com/office/drawing/2014/main" id="{5225D396-0C17-47AD-A699-5604F2B961BF}"/>
+                <a16:creationId xmlns:a16="http://schemas.microsoft.com/office/drawing/2014/main" id="{846A0B9D-2726-4ABB-B043-B228969D9F6F}"/>
               </a:ext>
             </a:extLst>
           </p:cNvPr>
@@ -1142,7 +1142,7 @@
           <p:cNvPr id="3" name="poster-title">
             <a:extLst xmlns:a="http://schemas.openxmlformats.org/drawingml/2006/main">
               <a:ext uri="{FF2B5EF4-FFF2-40B4-BE49-F238E27FC236}">
-                <a16:creationId xmlns:a16="http://schemas.microsoft.com/office/drawing/2014/main" id="{B3AAB54D-19C5-41B1-8B68-12063EA416B3}"/>
+                <a16:creationId xmlns:a16="http://schemas.microsoft.com/office/drawing/2014/main" id="{B6ED5C51-39D2-484D-8DCB-F7645C89E4EE}"/>
               </a:ext>
             </a:extLst>
           </p:cNvPr>
@@ -1192,7 +1192,7 @@
           <p:cNvPr id="4" name="authors">
             <a:extLst xmlns:a="http://schemas.openxmlformats.org/drawingml/2006/main">
               <a:ext uri="{FF2B5EF4-FFF2-40B4-BE49-F238E27FC236}">
-                <a16:creationId xmlns:a16="http://schemas.microsoft.com/office/drawing/2014/main" id="{718F821F-07B2-4286-A51F-47E2A4C172D9}"/>
+                <a16:creationId xmlns:a16="http://schemas.microsoft.com/office/drawing/2014/main" id="{E7A093AE-9508-47E9-AFBD-E0B318A92B5A}"/>
               </a:ext>
             </a:extLst>
           </p:cNvPr>
@@ -1242,7 +1242,7 @@
           <p:cNvPr id="5" name="affiliations">
             <a:extLst xmlns:a="http://schemas.openxmlformats.org/drawingml/2006/main">
               <a:ext uri="{FF2B5EF4-FFF2-40B4-BE49-F238E27FC236}">
-                <a16:creationId xmlns:a16="http://schemas.microsoft.com/office/drawing/2014/main" id="{04A02AA6-C0CA-4EA2-81BE-2BBE51037FDD}"/>
+                <a16:creationId xmlns:a16="http://schemas.microsoft.com/office/drawing/2014/main" id="{EB8CD483-6527-4651-85DA-9EED18A455D4}"/>
               </a:ext>
             </a:extLst>
           </p:cNvPr>
@@ -1292,7 +1292,7 @@
           <p:cNvPr id="6" name="citation">
             <a:extLst xmlns:a="http://schemas.openxmlformats.org/drawingml/2006/main">
               <a:ext uri="{FF2B5EF4-FFF2-40B4-BE49-F238E27FC236}">
-                <a16:creationId xmlns:a16="http://schemas.microsoft.com/office/drawing/2014/main" id="{2952E778-8F37-4BCE-85E3-31A284BD6B3B}"/>
+                <a16:creationId xmlns:a16="http://schemas.microsoft.com/office/drawing/2014/main" id="{949B8C68-3E26-4250-B1EA-CC335F37F793}"/>
               </a:ext>
             </a:extLst>
           </p:cNvPr>
@@ -1342,7 +1342,7 @@
           <p:cNvPr id="7" name="logo-slot-institution-logo">
             <a:extLst xmlns:a="http://schemas.openxmlformats.org/drawingml/2006/main">
               <a:ext uri="{FF2B5EF4-FFF2-40B4-BE49-F238E27FC236}">
-                <a16:creationId xmlns:a16="http://schemas.microsoft.com/office/drawing/2014/main" id="{11520F9D-4AEE-45EF-BDE9-5878AC16B068}"/>
+                <a16:creationId xmlns:a16="http://schemas.microsoft.com/office/drawing/2014/main" id="{BAD2772B-E5B8-4AFC-BD23-63C3CEE2676B}"/>
               </a:ext>
             </a:extLst>
           </p:cNvPr>
@@ -1377,7 +1377,7 @@
           <p:cNvPr id="8" name="logo-placeholder-institution-logo">
             <a:extLst xmlns:a="http://schemas.openxmlformats.org/drawingml/2006/main">
               <a:ext uri="{FF2B5EF4-FFF2-40B4-BE49-F238E27FC236}">
-                <a16:creationId xmlns:a16="http://schemas.microsoft.com/office/drawing/2014/main" id="{00405277-6549-429D-9E6E-4C70A29ABE9E}"/>
+                <a16:creationId xmlns:a16="http://schemas.microsoft.com/office/drawing/2014/main" id="{1838BCA7-127F-4A7D-9A9B-2EA13B6591BE}"/>
               </a:ext>
             </a:extLst>
           </p:cNvPr>
@@ -1427,7 +1427,7 @@
           <p:cNvPr id="9" name="header-summary">
             <a:extLst xmlns:a="http://schemas.openxmlformats.org/drawingml/2006/main">
               <a:ext uri="{FF2B5EF4-FFF2-40B4-BE49-F238E27FC236}">
-                <a16:creationId xmlns:a16="http://schemas.microsoft.com/office/drawing/2014/main" id="{B66A27FE-E50C-415F-A8DA-50C1DF0B2FC3}"/>
+                <a16:creationId xmlns:a16="http://schemas.microsoft.com/office/drawing/2014/main" id="{07676A7E-4BC4-4BCD-9006-23D6733DCCC6}"/>
               </a:ext>
             </a:extLst>
           </p:cNvPr>
@@ -1460,7 +1460,7 @@
           <p:cNvPr id="10" name="header-metric-1-value">
             <a:extLst xmlns:a="http://schemas.openxmlformats.org/drawingml/2006/main">
               <a:ext uri="{FF2B5EF4-FFF2-40B4-BE49-F238E27FC236}">
-                <a16:creationId xmlns:a16="http://schemas.microsoft.com/office/drawing/2014/main" id="{B656911E-987D-446E-AD35-C5FF594D2E8E}"/>
+                <a16:creationId xmlns:a16="http://schemas.microsoft.com/office/drawing/2014/main" id="{0BE4D400-0AF6-477C-96E8-B83655ABFFB1}"/>
               </a:ext>
             </a:extLst>
           </p:cNvPr>
@@ -1510,18 +1510,18 @@
           <p:cNvPr id="11" name="header-metric-1-label">
             <a:extLst xmlns:a="http://schemas.openxmlformats.org/drawingml/2006/main">
               <a:ext uri="{FF2B5EF4-FFF2-40B4-BE49-F238E27FC236}">
-                <a16:creationId xmlns:a16="http://schemas.microsoft.com/office/drawing/2014/main" id="{E18A8E4B-1635-418F-8F81-77CBD9DDA268}"/>
-              </a:ext>
-            </a:extLst>
-          </p:cNvPr>
-          <p:cNvSpPr>
-            <a:spLocks xmlns:a="http://schemas.openxmlformats.org/drawingml/2006/main" noGrp="1"/>
-          </p:cNvSpPr>
-          <p:nvPr/>
-        </p:nvSpPr>
-        <p:spPr>
-          <a:xfrm xmlns:a="http://schemas.openxmlformats.org/drawingml/2006/main">
-            <a:off x="32766000" y="3067050"/>
+                <a16:creationId xmlns:a16="http://schemas.microsoft.com/office/drawing/2014/main" id="{9DACED58-5A63-45CD-9910-F08666C102EC}"/>
+              </a:ext>
+            </a:extLst>
+          </p:cNvPr>
+          <p:cNvSpPr>
+            <a:spLocks xmlns:a="http://schemas.openxmlformats.org/drawingml/2006/main" noGrp="1"/>
+          </p:cNvSpPr>
+          <p:nvPr/>
+        </p:nvSpPr>
+        <p:spPr>
+          <a:xfrm xmlns:a="http://schemas.openxmlformats.org/drawingml/2006/main">
+            <a:off x="32766000" y="3028950"/>
             <a:ext cx="2476500" cy="838200"/>
           </a:xfrm>
           <a:prstGeom xmlns:a="http://schemas.openxmlformats.org/drawingml/2006/main" prst="rect">
@@ -1550,7 +1550,7 @@
                   <a:srgbClr val="102A43"/>
                 </a:solidFill>
               </a:rPr>
-              <a:t>signature features</a:t>
+              <a:t>primary observations</a:t>
             </a:r>
           </a:p>
         </p:txBody>
@@ -1560,7 +1560,7 @@
           <p:cNvPr id="12" name="header-metric-2-value">
             <a:extLst xmlns:a="http://schemas.openxmlformats.org/drawingml/2006/main">
               <a:ext uri="{FF2B5EF4-FFF2-40B4-BE49-F238E27FC236}">
-                <a16:creationId xmlns:a16="http://schemas.microsoft.com/office/drawing/2014/main" id="{77AFEF6C-0E5C-40AD-82C5-99D1CED610AA}"/>
+                <a16:creationId xmlns:a16="http://schemas.microsoft.com/office/drawing/2014/main" id="{63DE6165-53BA-4733-965F-1DDA275D6991}"/>
               </a:ext>
             </a:extLst>
           </p:cNvPr>
@@ -1610,18 +1610,18 @@
           <p:cNvPr id="13" name="header-metric-2-label">
             <a:extLst xmlns:a="http://schemas.openxmlformats.org/drawingml/2006/main">
               <a:ext uri="{FF2B5EF4-FFF2-40B4-BE49-F238E27FC236}">
-                <a16:creationId xmlns:a16="http://schemas.microsoft.com/office/drawing/2014/main" id="{D75684AA-8BC7-4679-928A-BE28B4D401E4}"/>
-              </a:ext>
-            </a:extLst>
-          </p:cNvPr>
-          <p:cNvSpPr>
-            <a:spLocks xmlns:a="http://schemas.openxmlformats.org/drawingml/2006/main" noGrp="1"/>
-          </p:cNvSpPr>
-          <p:nvPr/>
-        </p:nvSpPr>
-        <p:spPr>
-          <a:xfrm xmlns:a="http://schemas.openxmlformats.org/drawingml/2006/main">
-            <a:off x="35623500" y="3067050"/>
+                <a16:creationId xmlns:a16="http://schemas.microsoft.com/office/drawing/2014/main" id="{80280C05-01A4-41DE-8F8C-2292A7EE1A3E}"/>
+              </a:ext>
+            </a:extLst>
+          </p:cNvPr>
+          <p:cNvSpPr>
+            <a:spLocks xmlns:a="http://schemas.openxmlformats.org/drawingml/2006/main" noGrp="1"/>
+          </p:cNvSpPr>
+          <p:nvPr/>
+        </p:nvSpPr>
+        <p:spPr>
+          <a:xfrm xmlns:a="http://schemas.openxmlformats.org/drawingml/2006/main">
+            <a:off x="35623500" y="3028950"/>
             <a:ext cx="2476500" cy="838200"/>
           </a:xfrm>
           <a:prstGeom xmlns:a="http://schemas.openxmlformats.org/drawingml/2006/main" prst="rect">
@@ -1650,7 +1650,7 @@
                   <a:srgbClr val="102A43"/>
                 </a:solidFill>
               </a:rPr>
-              <a:t>discovery samples</a:t>
+              <a:t>analysis samples</a:t>
             </a:r>
           </a:p>
         </p:txBody>
@@ -1660,7 +1660,7 @@
           <p:cNvPr id="14" name="header-metric-3-value">
             <a:extLst xmlns:a="http://schemas.openxmlformats.org/drawingml/2006/main">
               <a:ext uri="{FF2B5EF4-FFF2-40B4-BE49-F238E27FC236}">
-                <a16:creationId xmlns:a16="http://schemas.microsoft.com/office/drawing/2014/main" id="{8E7F891D-AD44-4378-9516-BD7C288EA8BB}"/>
+                <a16:creationId xmlns:a16="http://schemas.microsoft.com/office/drawing/2014/main" id="{D7D0DF91-6EF1-4339-AAC5-2CA30240F22D}"/>
               </a:ext>
             </a:extLst>
           </p:cNvPr>
@@ -1710,18 +1710,18 @@
           <p:cNvPr id="15" name="header-metric-3-label">
             <a:extLst xmlns:a="http://schemas.openxmlformats.org/drawingml/2006/main">
               <a:ext uri="{FF2B5EF4-FFF2-40B4-BE49-F238E27FC236}">
-                <a16:creationId xmlns:a16="http://schemas.microsoft.com/office/drawing/2014/main" id="{BB123E47-4A0F-4CEE-94E3-2E2C30EEB17D}"/>
-              </a:ext>
-            </a:extLst>
-          </p:cNvPr>
-          <p:cNvSpPr>
-            <a:spLocks xmlns:a="http://schemas.openxmlformats.org/drawingml/2006/main" noGrp="1"/>
-          </p:cNvSpPr>
-          <p:nvPr/>
-        </p:nvSpPr>
-        <p:spPr>
-          <a:xfrm xmlns:a="http://schemas.openxmlformats.org/drawingml/2006/main">
-            <a:off x="38481000" y="3067050"/>
+                <a16:creationId xmlns:a16="http://schemas.microsoft.com/office/drawing/2014/main" id="{B89DA621-120E-4DE1-A5FB-E9BE9CCB11EE}"/>
+              </a:ext>
+            </a:extLst>
+          </p:cNvPr>
+          <p:cNvSpPr>
+            <a:spLocks xmlns:a="http://schemas.openxmlformats.org/drawingml/2006/main" noGrp="1"/>
+          </p:cNvSpPr>
+          <p:nvPr/>
+        </p:nvSpPr>
+        <p:spPr>
+          <a:xfrm xmlns:a="http://schemas.openxmlformats.org/drawingml/2006/main">
+            <a:off x="38481000" y="3028950"/>
             <a:ext cx="2476500" cy="838200"/>
           </a:xfrm>
           <a:prstGeom xmlns:a="http://schemas.openxmlformats.org/drawingml/2006/main" prst="rect">
@@ -1750,7 +1750,7 @@
                   <a:srgbClr val="102A43"/>
                 </a:solidFill>
               </a:rPr>
-              <a:t>validation cohorts</a:t>
+              <a:t>validation units</a:t>
             </a:r>
           </a:p>
         </p:txBody>
@@ -1760,7 +1760,7 @@
           <p:cNvPr id="16" name="question-title">
             <a:extLst xmlns:a="http://schemas.openxmlformats.org/drawingml/2006/main">
               <a:ext uri="{FF2B5EF4-FFF2-40B4-BE49-F238E27FC236}">
-                <a16:creationId xmlns:a16="http://schemas.microsoft.com/office/drawing/2014/main" id="{F5E6D123-E2D1-44BF-9ACA-C32DE0983479}"/>
+                <a16:creationId xmlns:a16="http://schemas.microsoft.com/office/drawing/2014/main" id="{AD4F558D-8596-42C3-BF5F-FA30D471AB58}"/>
               </a:ext>
             </a:extLst>
           </p:cNvPr>
@@ -1800,7 +1800,7 @@
                   <a:srgbClr val="0F5F73"/>
                 </a:solidFill>
               </a:rPr>
-              <a:t>Research question</a:t>
+              <a:t>Biological question</a:t>
             </a:r>
           </a:p>
         </p:txBody>
@@ -1810,7 +1810,7 @@
           <p:cNvPr id="17" name="question-rule">
             <a:extLst xmlns:a="http://schemas.openxmlformats.org/drawingml/2006/main">
               <a:ext uri="{FF2B5EF4-FFF2-40B4-BE49-F238E27FC236}">
-                <a16:creationId xmlns:a16="http://schemas.microsoft.com/office/drawing/2014/main" id="{50636BFE-E796-40D9-B1D3-A502E55F8836}"/>
+                <a16:creationId xmlns:a16="http://schemas.microsoft.com/office/drawing/2014/main" id="{F8BE8720-BF4D-4A74-93FA-A5A53DFFF9F7}"/>
               </a:ext>
             </a:extLst>
           </p:cNvPr>
@@ -1843,7 +1843,7 @@
           <p:cNvPr id="18" name="research-question">
             <a:extLst xmlns:a="http://schemas.openxmlformats.org/drawingml/2006/main">
               <a:ext uri="{FF2B5EF4-FFF2-40B4-BE49-F238E27FC236}">
-                <a16:creationId xmlns:a16="http://schemas.microsoft.com/office/drawing/2014/main" id="{FB33F9C1-14A3-4AAC-8887-28609DB93AFE}"/>
+                <a16:creationId xmlns:a16="http://schemas.microsoft.com/office/drawing/2014/main" id="{69B40EFF-33A7-4F3C-ADE2-D03CA0439A8B}"/>
               </a:ext>
             </a:extLst>
           </p:cNvPr>
@@ -1855,7 +1855,7 @@
         <p:spPr>
           <a:xfrm xmlns:a="http://schemas.openxmlformats.org/drawingml/2006/main">
             <a:off x="1333500" y="6496050"/>
-            <a:ext cx="11620500" cy="2238375"/>
+            <a:ext cx="11620500" cy="2095500"/>
           </a:xfrm>
           <a:prstGeom xmlns:a="http://schemas.openxmlformats.org/drawingml/2006/main" prst="rect">
             <a:avLst/>
@@ -1883,7 +1883,7 @@
                   <a:srgbClr val="102A43"/>
                 </a:solidFill>
               </a:rPr>
-              <a:t>State the biological or clinical question in two concise sentences.</a:t>
+              <a:t>State the scientific question in two concise sentences.</a:t>
             </a:r>
           </a:p>
         </p:txBody>
@@ -1893,7 +1893,7 @@
           <p:cNvPr id="19" name="question-evidence">
             <a:extLst xmlns:a="http://schemas.openxmlformats.org/drawingml/2006/main">
               <a:ext uri="{FF2B5EF4-FFF2-40B4-BE49-F238E27FC236}">
-                <a16:creationId xmlns:a16="http://schemas.microsoft.com/office/drawing/2014/main" id="{5F9D8EAA-35A1-409E-B8E0-B65AC9ED5A89}"/>
+                <a16:creationId xmlns:a16="http://schemas.microsoft.com/office/drawing/2014/main" id="{1DE59499-D57F-4CE0-8587-B7854791ECDE}"/>
               </a:ext>
             </a:extLst>
           </p:cNvPr>
@@ -1921,14 +1921,14 @@
           <a:lstStyle xmlns:a="http://schemas.openxmlformats.org/drawingml/2006/main"/>
           <a:p xmlns:a="http://schemas.openxmlformats.org/drawingml/2006/main">
             <a:pPr>
-              <a:defRPr sz="1875" i="1">
+              <a:defRPr sz="1875">
                 <a:solidFill>
                   <a:srgbClr val="2C8C99"/>
                 </a:solidFill>
               </a:defRPr>
             </a:pPr>
             <a:r>
-              <a:rPr sz="1875" i="1">
+              <a:rPr sz="1875">
                 <a:solidFill>
                   <a:srgbClr val="2C8C99"/>
                 </a:solidFill>
@@ -1943,7 +1943,7 @@
           <p:cNvPr id="20" name="pipeline-title">
             <a:extLst xmlns:a="http://schemas.openxmlformats.org/drawingml/2006/main">
               <a:ext uri="{FF2B5EF4-FFF2-40B4-BE49-F238E27FC236}">
-                <a16:creationId xmlns:a16="http://schemas.microsoft.com/office/drawing/2014/main" id="{B45E763E-4AF5-47E5-BD8A-73715D33EF51}"/>
+                <a16:creationId xmlns:a16="http://schemas.microsoft.com/office/drawing/2014/main" id="{596648E0-7752-4671-A07A-1944FA3E955A}"/>
               </a:ext>
             </a:extLst>
           </p:cNvPr>
@@ -1993,7 +1993,7 @@
           <p:cNvPr id="21" name="pipeline-rule">
             <a:extLst xmlns:a="http://schemas.openxmlformats.org/drawingml/2006/main">
               <a:ext uri="{FF2B5EF4-FFF2-40B4-BE49-F238E27FC236}">
-                <a16:creationId xmlns:a16="http://schemas.microsoft.com/office/drawing/2014/main" id="{DA0D7B69-CE86-44A0-AD8D-21D2A2A0EF63}"/>
+                <a16:creationId xmlns:a16="http://schemas.microsoft.com/office/drawing/2014/main" id="{4245FF24-F6DF-4EAF-9C99-907D41109752}"/>
               </a:ext>
             </a:extLst>
           </p:cNvPr>
@@ -2026,7 +2026,7 @@
           <p:cNvPr id="22" name="pipeline-1-number-bg">
             <a:extLst xmlns:a="http://schemas.openxmlformats.org/drawingml/2006/main">
               <a:ext uri="{FF2B5EF4-FFF2-40B4-BE49-F238E27FC236}">
-                <a16:creationId xmlns:a16="http://schemas.microsoft.com/office/drawing/2014/main" id="{F80AC29C-DC41-4C19-860F-E28EA4F291F7}"/>
+                <a16:creationId xmlns:a16="http://schemas.microsoft.com/office/drawing/2014/main" id="{6004F4AC-B8F9-4A82-90DB-7787B4A9FC3C}"/>
               </a:ext>
             </a:extLst>
           </p:cNvPr>
@@ -2059,7 +2059,7 @@
           <p:cNvPr id="23" name="pipeline-1-number">
             <a:extLst xmlns:a="http://schemas.openxmlformats.org/drawingml/2006/main">
               <a:ext uri="{FF2B5EF4-FFF2-40B4-BE49-F238E27FC236}">
-                <a16:creationId xmlns:a16="http://schemas.microsoft.com/office/drawing/2014/main" id="{39AC36DC-D5B8-45D0-B764-A31081F2C4F6}"/>
+                <a16:creationId xmlns:a16="http://schemas.microsoft.com/office/drawing/2014/main" id="{CA38B435-3D3D-46D6-A1C8-6376A7FA2E18}"/>
               </a:ext>
             </a:extLst>
           </p:cNvPr>
@@ -2109,7 +2109,7 @@
           <p:cNvPr id="24" name="pipeline-1-text">
             <a:extLst xmlns:a="http://schemas.openxmlformats.org/drawingml/2006/main">
               <a:ext uri="{FF2B5EF4-FFF2-40B4-BE49-F238E27FC236}">
-                <a16:creationId xmlns:a16="http://schemas.microsoft.com/office/drawing/2014/main" id="{10F2BDE4-A5CA-4DEA-B794-3357E1270539}"/>
+                <a16:creationId xmlns:a16="http://schemas.microsoft.com/office/drawing/2014/main" id="{E531F8F9-4B4D-406C-B680-347CBCEC7306}"/>
               </a:ext>
             </a:extLst>
           </p:cNvPr>
@@ -2137,14 +2137,14 @@
           <a:lstStyle xmlns:a="http://schemas.openxmlformats.org/drawingml/2006/main"/>
           <a:p xmlns:a="http://schemas.openxmlformats.org/drawingml/2006/main">
             <a:pPr>
-              <a:defRPr sz="2850" b="1">
-                <a:solidFill>
-                  <a:srgbClr val="102A43"/>
-                </a:solidFill>
-              </a:defRPr>
-            </a:pPr>
-            <a:r>
-              <a:rPr sz="2850" b="1">
+              <a:defRPr sz="2850">
+                <a:solidFill>
+                  <a:srgbClr val="102A43"/>
+                </a:solidFill>
+              </a:defRPr>
+            </a:pPr>
+            <a:r>
+              <a:rPr sz="2850">
                 <a:solidFill>
                   <a:srgbClr val="102A43"/>
                 </a:solidFill>
@@ -2159,7 +2159,7 @@
           <p:cNvPr id="25" name="pipeline-2-number-bg">
             <a:extLst xmlns:a="http://schemas.openxmlformats.org/drawingml/2006/main">
               <a:ext uri="{FF2B5EF4-FFF2-40B4-BE49-F238E27FC236}">
-                <a16:creationId xmlns:a16="http://schemas.microsoft.com/office/drawing/2014/main" id="{AA8575E1-BA98-4874-BB9A-5BD02552E6A3}"/>
+                <a16:creationId xmlns:a16="http://schemas.microsoft.com/office/drawing/2014/main" id="{9CFDD9E3-08FF-48BB-87D0-6679213590EE}"/>
               </a:ext>
             </a:extLst>
           </p:cNvPr>
@@ -2192,7 +2192,7 @@
           <p:cNvPr id="26" name="pipeline-2-number">
             <a:extLst xmlns:a="http://schemas.openxmlformats.org/drawingml/2006/main">
               <a:ext uri="{FF2B5EF4-FFF2-40B4-BE49-F238E27FC236}">
-                <a16:creationId xmlns:a16="http://schemas.microsoft.com/office/drawing/2014/main" id="{3FE1C661-9FFD-4D5E-9191-1ADF4CAC18B9}"/>
+                <a16:creationId xmlns:a16="http://schemas.microsoft.com/office/drawing/2014/main" id="{28D32A8D-FCD8-43EB-B55A-34D3C466C34A}"/>
               </a:ext>
             </a:extLst>
           </p:cNvPr>
@@ -2242,7 +2242,7 @@
           <p:cNvPr id="27" name="pipeline-2-text">
             <a:extLst xmlns:a="http://schemas.openxmlformats.org/drawingml/2006/main">
               <a:ext uri="{FF2B5EF4-FFF2-40B4-BE49-F238E27FC236}">
-                <a16:creationId xmlns:a16="http://schemas.microsoft.com/office/drawing/2014/main" id="{53F19F9C-00AD-4A41-B812-672A9D84D4D4}"/>
+                <a16:creationId xmlns:a16="http://schemas.microsoft.com/office/drawing/2014/main" id="{0AA73FDC-CB2A-44FC-A262-139FAD59B8EB}"/>
               </a:ext>
             </a:extLst>
           </p:cNvPr>
@@ -2270,14 +2270,14 @@
           <a:lstStyle xmlns:a="http://schemas.openxmlformats.org/drawingml/2006/main"/>
           <a:p xmlns:a="http://schemas.openxmlformats.org/drawingml/2006/main">
             <a:pPr>
-              <a:defRPr sz="2850" b="1">
-                <a:solidFill>
-                  <a:srgbClr val="102A43"/>
-                </a:solidFill>
-              </a:defRPr>
-            </a:pPr>
-            <a:r>
-              <a:rPr sz="2850" b="1">
+              <a:defRPr sz="2850">
+                <a:solidFill>
+                  <a:srgbClr val="102A43"/>
+                </a:solidFill>
+              </a:defRPr>
+            </a:pPr>
+            <a:r>
+              <a:rPr sz="2850">
                 <a:solidFill>
                   <a:srgbClr val="102A43"/>
                 </a:solidFill>
@@ -2292,7 +2292,7 @@
           <p:cNvPr id="28" name="pipeline-3-number-bg">
             <a:extLst xmlns:a="http://schemas.openxmlformats.org/drawingml/2006/main">
               <a:ext uri="{FF2B5EF4-FFF2-40B4-BE49-F238E27FC236}">
-                <a16:creationId xmlns:a16="http://schemas.microsoft.com/office/drawing/2014/main" id="{5D6DFA99-3751-438D-B94E-C54D612B0242}"/>
+                <a16:creationId xmlns:a16="http://schemas.microsoft.com/office/drawing/2014/main" id="{F7ABFA50-2554-4809-A453-72B3EB6BC60D}"/>
               </a:ext>
             </a:extLst>
           </p:cNvPr>
@@ -2325,7 +2325,7 @@
           <p:cNvPr id="29" name="pipeline-3-number">
             <a:extLst xmlns:a="http://schemas.openxmlformats.org/drawingml/2006/main">
               <a:ext uri="{FF2B5EF4-FFF2-40B4-BE49-F238E27FC236}">
-                <a16:creationId xmlns:a16="http://schemas.microsoft.com/office/drawing/2014/main" id="{01ABDC1A-16C0-4B45-9254-46CBA84E4540}"/>
+                <a16:creationId xmlns:a16="http://schemas.microsoft.com/office/drawing/2014/main" id="{5BAD18AB-6E20-47D6-9B3D-60C72E5FFDEB}"/>
               </a:ext>
             </a:extLst>
           </p:cNvPr>
@@ -2375,7 +2375,7 @@
           <p:cNvPr id="30" name="pipeline-3-text">
             <a:extLst xmlns:a="http://schemas.openxmlformats.org/drawingml/2006/main">
               <a:ext uri="{FF2B5EF4-FFF2-40B4-BE49-F238E27FC236}">
-                <a16:creationId xmlns:a16="http://schemas.microsoft.com/office/drawing/2014/main" id="{359BCF40-932A-4C09-B8B3-64FDC5C63E4B}"/>
+                <a16:creationId xmlns:a16="http://schemas.microsoft.com/office/drawing/2014/main" id="{AAC76AB7-6926-4337-9F2B-0CAD521E2761}"/>
               </a:ext>
             </a:extLst>
           </p:cNvPr>
@@ -2403,14 +2403,14 @@
           <a:lstStyle xmlns:a="http://schemas.openxmlformats.org/drawingml/2006/main"/>
           <a:p xmlns:a="http://schemas.openxmlformats.org/drawingml/2006/main">
             <a:pPr>
-              <a:defRPr sz="2850" b="1">
-                <a:solidFill>
-                  <a:srgbClr val="102A43"/>
-                </a:solidFill>
-              </a:defRPr>
-            </a:pPr>
-            <a:r>
-              <a:rPr sz="2850" b="1">
+              <a:defRPr sz="2850">
+                <a:solidFill>
+                  <a:srgbClr val="102A43"/>
+                </a:solidFill>
+              </a:defRPr>
+            </a:pPr>
+            <a:r>
+              <a:rPr sz="2850">
                 <a:solidFill>
                   <a:srgbClr val="102A43"/>
                 </a:solidFill>
@@ -2425,7 +2425,7 @@
           <p:cNvPr id="31" name="pipeline-4-number-bg">
             <a:extLst xmlns:a="http://schemas.openxmlformats.org/drawingml/2006/main">
               <a:ext uri="{FF2B5EF4-FFF2-40B4-BE49-F238E27FC236}">
-                <a16:creationId xmlns:a16="http://schemas.microsoft.com/office/drawing/2014/main" id="{974F87F6-6387-46B2-8A83-8F71BAE33AFA}"/>
+                <a16:creationId xmlns:a16="http://schemas.microsoft.com/office/drawing/2014/main" id="{B1F82A49-040F-4A80-9DF9-80229FC1D56A}"/>
               </a:ext>
             </a:extLst>
           </p:cNvPr>
@@ -2458,7 +2458,7 @@
           <p:cNvPr id="32" name="pipeline-4-number">
             <a:extLst xmlns:a="http://schemas.openxmlformats.org/drawingml/2006/main">
               <a:ext uri="{FF2B5EF4-FFF2-40B4-BE49-F238E27FC236}">
-                <a16:creationId xmlns:a16="http://schemas.microsoft.com/office/drawing/2014/main" id="{DBD89A33-0238-4F24-BAAC-8133402C72E9}"/>
+                <a16:creationId xmlns:a16="http://schemas.microsoft.com/office/drawing/2014/main" id="{0640E183-7548-4313-B8B4-2738F58C39AE}"/>
               </a:ext>
             </a:extLst>
           </p:cNvPr>
@@ -2508,7 +2508,7 @@
           <p:cNvPr id="33" name="pipeline-4-text">
             <a:extLst xmlns:a="http://schemas.openxmlformats.org/drawingml/2006/main">
               <a:ext uri="{FF2B5EF4-FFF2-40B4-BE49-F238E27FC236}">
-                <a16:creationId xmlns:a16="http://schemas.microsoft.com/office/drawing/2014/main" id="{4EF78C30-B261-4423-91C5-28F4F603B755}"/>
+                <a16:creationId xmlns:a16="http://schemas.microsoft.com/office/drawing/2014/main" id="{C594AE63-6EAB-4365-B40B-464ABD455BAC}"/>
               </a:ext>
             </a:extLst>
           </p:cNvPr>
@@ -2536,14 +2536,14 @@
           <a:lstStyle xmlns:a="http://schemas.openxmlformats.org/drawingml/2006/main"/>
           <a:p xmlns:a="http://schemas.openxmlformats.org/drawingml/2006/main">
             <a:pPr>
-              <a:defRPr sz="2850" b="1">
-                <a:solidFill>
-                  <a:srgbClr val="102A43"/>
-                </a:solidFill>
-              </a:defRPr>
-            </a:pPr>
-            <a:r>
-              <a:rPr sz="2850" b="1">
+              <a:defRPr sz="2850">
+                <a:solidFill>
+                  <a:srgbClr val="102A43"/>
+                </a:solidFill>
+              </a:defRPr>
+            </a:pPr>
+            <a:r>
+              <a:rPr sz="2850">
                 <a:solidFill>
                   <a:srgbClr val="102A43"/>
                 </a:solidFill>
@@ -2558,7 +2558,7 @@
           <p:cNvPr id="34" name="dataset-panel">
             <a:extLst xmlns:a="http://schemas.openxmlformats.org/drawingml/2006/main">
               <a:ext uri="{FF2B5EF4-FFF2-40B4-BE49-F238E27FC236}">
-                <a16:creationId xmlns:a16="http://schemas.microsoft.com/office/drawing/2014/main" id="{FBFF06DA-F8D0-4C93-9215-E01B4CDDBC15}"/>
+                <a16:creationId xmlns:a16="http://schemas.microsoft.com/office/drawing/2014/main" id="{ACB8F028-9632-4210-82E4-3A9FEF203336}"/>
               </a:ext>
             </a:extLst>
           </p:cNvPr>
@@ -2593,7 +2593,7 @@
           <p:cNvPr id="35" name="dataset-kicker">
             <a:extLst xmlns:a="http://schemas.openxmlformats.org/drawingml/2006/main">
               <a:ext uri="{FF2B5EF4-FFF2-40B4-BE49-F238E27FC236}">
-                <a16:creationId xmlns:a16="http://schemas.microsoft.com/office/drawing/2014/main" id="{6344AB8E-5A4F-4F19-9FA9-043A09B313CE}"/>
+                <a16:creationId xmlns:a16="http://schemas.microsoft.com/office/drawing/2014/main" id="{6124E1A2-E473-450F-BC1E-603EB83EA567}"/>
               </a:ext>
             </a:extLst>
           </p:cNvPr>
@@ -2643,7 +2643,7 @@
           <p:cNvPr id="36" name="datasets">
             <a:extLst xmlns:a="http://schemas.openxmlformats.org/drawingml/2006/main">
               <a:ext uri="{FF2B5EF4-FFF2-40B4-BE49-F238E27FC236}">
-                <a16:creationId xmlns:a16="http://schemas.microsoft.com/office/drawing/2014/main" id="{FEA2DCF9-D854-4A29-ABBA-6B726048CDB4}"/>
+                <a16:creationId xmlns:a16="http://schemas.microsoft.com/office/drawing/2014/main" id="{72463858-A888-430D-9BD4-B0F564956EF8}"/>
               </a:ext>
             </a:extLst>
           </p:cNvPr>
@@ -2655,7 +2655,7 @@
         <p:spPr>
           <a:xfrm xmlns:a="http://schemas.openxmlformats.org/drawingml/2006/main">
             <a:off x="1600200" y="14239875"/>
-            <a:ext cx="11087100" cy="2190750"/>
+            <a:ext cx="11087100" cy="2057400"/>
           </a:xfrm>
           <a:prstGeom xmlns:a="http://schemas.openxmlformats.org/drawingml/2006/main" prst="rect">
             <a:avLst/>
@@ -2683,7 +2683,7 @@
                   <a:srgbClr val="102A43"/>
                 </a:solidFill>
               </a:rPr>
-              <a:t>Discovery cohort</a:t>
+              <a:t>Discovery set</a:t>
             </a:r>
           </a:p>
           <a:p xmlns:a="http://schemas.openxmlformats.org/drawingml/2006/main">
@@ -2700,7 +2700,7 @@
                   <a:srgbClr val="102A43"/>
                 </a:solidFill>
               </a:rPr>
-              <a:t>Training and test split</a:t>
+              <a:t>Primary analysis</a:t>
             </a:r>
           </a:p>
           <a:p xmlns:a="http://schemas.openxmlformats.org/drawingml/2006/main">
@@ -2717,7 +2717,7 @@
                   <a:srgbClr val="102A43"/>
                 </a:solidFill>
               </a:rPr>
-              <a:t>External validation</a:t>
+              <a:t>Validation set</a:t>
             </a:r>
           </a:p>
           <a:p xmlns:a="http://schemas.openxmlformats.org/drawingml/2006/main">
@@ -2734,7 +2734,7 @@
                   <a:srgbClr val="102A43"/>
                 </a:solidFill>
               </a:rPr>
-              <a:t>Orthogonal validation</a:t>
+              <a:t>Sensitivity analysis</a:t>
             </a:r>
           </a:p>
         </p:txBody>
@@ -2744,7 +2744,7 @@
           <p:cNvPr id="37" name="dataset-evidence">
             <a:extLst xmlns:a="http://schemas.openxmlformats.org/drawingml/2006/main">
               <a:ext uri="{FF2B5EF4-FFF2-40B4-BE49-F238E27FC236}">
-                <a16:creationId xmlns:a16="http://schemas.microsoft.com/office/drawing/2014/main" id="{0C65B472-9EF1-432D-8453-F6ADE6AAD5F5}"/>
+                <a16:creationId xmlns:a16="http://schemas.microsoft.com/office/drawing/2014/main" id="{3345E8F5-1811-4976-A262-541F53455DF8}"/>
               </a:ext>
             </a:extLst>
           </p:cNvPr>
@@ -2772,14 +2772,14 @@
           <a:lstStyle xmlns:a="http://schemas.openxmlformats.org/drawingml/2006/main"/>
           <a:p xmlns:a="http://schemas.openxmlformats.org/drawingml/2006/main">
             <a:pPr>
-              <a:defRPr sz="1875" i="1">
+              <a:defRPr sz="1875">
                 <a:solidFill>
                   <a:srgbClr val="2C8C99"/>
                 </a:solidFill>
               </a:defRPr>
             </a:pPr>
             <a:r>
-              <a:rPr sz="1875" i="1">
+              <a:rPr sz="1875">
                 <a:solidFill>
                   <a:srgbClr val="2C8C99"/>
                 </a:solidFill>
@@ -2794,7 +2794,7 @@
           <p:cNvPr id="38" name="figure-one-heading-title">
             <a:extLst xmlns:a="http://schemas.openxmlformats.org/drawingml/2006/main">
               <a:ext uri="{FF2B5EF4-FFF2-40B4-BE49-F238E27FC236}">
-                <a16:creationId xmlns:a16="http://schemas.microsoft.com/office/drawing/2014/main" id="{0C624AC1-B4A8-4D80-8A62-7A1C14C45182}"/>
+                <a16:creationId xmlns:a16="http://schemas.microsoft.com/office/drawing/2014/main" id="{ED2C3831-F041-4B04-9DE7-3646B8E8DEAF}"/>
               </a:ext>
             </a:extLst>
           </p:cNvPr>
@@ -2844,7 +2844,7 @@
           <p:cNvPr id="39" name="figure-one-heading-rule">
             <a:extLst xmlns:a="http://schemas.openxmlformats.org/drawingml/2006/main">
               <a:ext uri="{FF2B5EF4-FFF2-40B4-BE49-F238E27FC236}">
-                <a16:creationId xmlns:a16="http://schemas.microsoft.com/office/drawing/2014/main" id="{64844983-825B-42ED-A5F1-EB50A94CF47C}"/>
+                <a16:creationId xmlns:a16="http://schemas.microsoft.com/office/drawing/2014/main" id="{5DE654A6-F559-483B-A255-8E393EBA2422}"/>
               </a:ext>
             </a:extLst>
           </p:cNvPr>
@@ -2877,7 +2877,7 @@
           <p:cNvPr id="40" name="figure-one-frame">
             <a:extLst xmlns:a="http://schemas.openxmlformats.org/drawingml/2006/main">
               <a:ext uri="{FF2B5EF4-FFF2-40B4-BE49-F238E27FC236}">
-                <a16:creationId xmlns:a16="http://schemas.microsoft.com/office/drawing/2014/main" id="{5733C612-C5A0-4D62-8A0A-EC5B94115D71}"/>
+                <a16:creationId xmlns:a16="http://schemas.microsoft.com/office/drawing/2014/main" id="{FFA328DC-C2A5-4BFD-A954-18D62D2AB428}"/>
               </a:ext>
             </a:extLst>
           </p:cNvPr>
@@ -2912,7 +2912,7 @@
           <p:cNvPr id="41" name="figure-one-placeholder">
             <a:extLst xmlns:a="http://schemas.openxmlformats.org/drawingml/2006/main">
               <a:ext uri="{FF2B5EF4-FFF2-40B4-BE49-F238E27FC236}">
-                <a16:creationId xmlns:a16="http://schemas.microsoft.com/office/drawing/2014/main" id="{70F02DA1-1A27-4969-94EF-E7F4FFDC163B}"/>
+                <a16:creationId xmlns:a16="http://schemas.microsoft.com/office/drawing/2014/main" id="{A179070D-195A-48AF-A760-EF72188EEED5}"/>
               </a:ext>
             </a:extLst>
           </p:cNvPr>
@@ -2947,7 +2947,7 @@
           <p:cNvPr id="42" name="figure-one-placeholder-label">
             <a:extLst xmlns:a="http://schemas.openxmlformats.org/drawingml/2006/main">
               <a:ext uri="{FF2B5EF4-FFF2-40B4-BE49-F238E27FC236}">
-                <a16:creationId xmlns:a16="http://schemas.microsoft.com/office/drawing/2014/main" id="{70B59292-CF2D-4CF7-9CCB-C23E6DDFA7B3}"/>
+                <a16:creationId xmlns:a16="http://schemas.microsoft.com/office/drawing/2014/main" id="{E5D54BC4-0527-46A6-B495-DA00D3260798}"/>
               </a:ext>
             </a:extLst>
           </p:cNvPr>
@@ -2987,7 +2987,7 @@
                   <a:srgbClr val="2C8C99"/>
                 </a:solidFill>
               </a:rPr>
-              <a:t>SCIENTIFIC FIGURE</a:t>
+              <a:t>scientific figure</a:t>
             </a:r>
           </a:p>
         </p:txBody>
@@ -2997,7 +2997,7 @@
           <p:cNvPr id="43" name="figure-one-caption">
             <a:extLst xmlns:a="http://schemas.openxmlformats.org/drawingml/2006/main">
               <a:ext uri="{FF2B5EF4-FFF2-40B4-BE49-F238E27FC236}">
-                <a16:creationId xmlns:a16="http://schemas.microsoft.com/office/drawing/2014/main" id="{BAB32BC1-3578-4B10-A1C5-C087E2B65F44}"/>
+                <a16:creationId xmlns:a16="http://schemas.microsoft.com/office/drawing/2014/main" id="{C3C4A98C-72A2-4D60-96C9-0F0D9906430B}"/>
               </a:ext>
             </a:extLst>
           </p:cNvPr>
@@ -3009,7 +3009,7 @@
         <p:spPr>
           <a:xfrm xmlns:a="http://schemas.openxmlformats.org/drawingml/2006/main">
             <a:off x="1562100" y="27460575"/>
-            <a:ext cx="11163300" cy="400050"/>
+            <a:ext cx="11163300" cy="314325"/>
           </a:xfrm>
           <a:prstGeom xmlns:a="http://schemas.openxmlformats.org/drawingml/2006/main" prst="rect">
             <a:avLst/>
@@ -3037,7 +3037,7 @@
                   <a:srgbClr val="102A43"/>
                 </a:solidFill>
               </a:rPr>
-              <a:t>Figure caption</a:t>
+              <a:t>Scientific Figure caption</a:t>
             </a:r>
           </a:p>
         </p:txBody>
@@ -3047,18 +3047,18 @@
           <p:cNvPr id="44" name="figure-one-source">
             <a:extLst xmlns:a="http://schemas.openxmlformats.org/drawingml/2006/main">
               <a:ext uri="{FF2B5EF4-FFF2-40B4-BE49-F238E27FC236}">
-                <a16:creationId xmlns:a16="http://schemas.microsoft.com/office/drawing/2014/main" id="{63DE9C76-7076-4A63-A6BA-57DC5E3C87A3}"/>
-              </a:ext>
-            </a:extLst>
-          </p:cNvPr>
-          <p:cNvSpPr>
-            <a:spLocks xmlns:a="http://schemas.openxmlformats.org/drawingml/2006/main" noGrp="1"/>
-          </p:cNvSpPr>
-          <p:nvPr/>
-        </p:nvSpPr>
-        <p:spPr>
-          <a:xfrm xmlns:a="http://schemas.openxmlformats.org/drawingml/2006/main">
-            <a:off x="1562100" y="27774900"/>
+                <a16:creationId xmlns:a16="http://schemas.microsoft.com/office/drawing/2014/main" id="{089E4736-C7F3-48E9-98F4-5F22941F2713}"/>
+              </a:ext>
+            </a:extLst>
+          </p:cNvPr>
+          <p:cNvSpPr>
+            <a:spLocks xmlns:a="http://schemas.openxmlformats.org/drawingml/2006/main" noGrp="1"/>
+          </p:cNvSpPr>
+          <p:nvPr/>
+        </p:nvSpPr>
+        <p:spPr>
+          <a:xfrm xmlns:a="http://schemas.openxmlformats.org/drawingml/2006/main">
+            <a:off x="1562100" y="27784425"/>
             <a:ext cx="11163300" cy="361950"/>
           </a:xfrm>
           <a:prstGeom xmlns:a="http://schemas.openxmlformats.org/drawingml/2006/main" prst="rect">
@@ -3075,14 +3075,14 @@
           <a:lstStyle xmlns:a="http://schemas.openxmlformats.org/drawingml/2006/main"/>
           <a:p xmlns:a="http://schemas.openxmlformats.org/drawingml/2006/main">
             <a:pPr>
-              <a:defRPr sz="1875" i="1">
+              <a:defRPr sz="1875">
                 <a:solidFill>
                   <a:srgbClr val="2C8C99"/>
                 </a:solidFill>
               </a:defRPr>
             </a:pPr>
             <a:r>
-              <a:rPr sz="1875" i="1">
+              <a:rPr sz="1875">
                 <a:solidFill>
                   <a:srgbClr val="2C8C99"/>
                 </a:solidFill>
@@ -3097,7 +3097,7 @@
           <p:cNvPr id="45" name="central-takeaway">
             <a:extLst xmlns:a="http://schemas.openxmlformats.org/drawingml/2006/main">
               <a:ext uri="{FF2B5EF4-FFF2-40B4-BE49-F238E27FC236}">
-                <a16:creationId xmlns:a16="http://schemas.microsoft.com/office/drawing/2014/main" id="{91A37D52-7246-4CDA-86FC-37B764D95481}"/>
+                <a16:creationId xmlns:a16="http://schemas.microsoft.com/office/drawing/2014/main" id="{D828AF16-2CD8-4129-B92E-33A43687A89D}"/>
               </a:ext>
             </a:extLst>
           </p:cNvPr>
@@ -3130,7 +3130,7 @@
           <p:cNvPr id="46" name="central-takeaway-title">
             <a:extLst xmlns:a="http://schemas.openxmlformats.org/drawingml/2006/main">
               <a:ext uri="{FF2B5EF4-FFF2-40B4-BE49-F238E27FC236}">
-                <a16:creationId xmlns:a16="http://schemas.microsoft.com/office/drawing/2014/main" id="{8009C112-CA29-4894-A5B9-46051C6EA33C}"/>
+                <a16:creationId xmlns:a16="http://schemas.microsoft.com/office/drawing/2014/main" id="{3BD54D28-271C-47BB-8D58-D26A8B4D3104}"/>
               </a:ext>
             </a:extLst>
           </p:cNvPr>
@@ -3180,7 +3180,7 @@
           <p:cNvPr id="47" name="central-takeaway-subtitle">
             <a:extLst xmlns:a="http://schemas.openxmlformats.org/drawingml/2006/main">
               <a:ext uri="{FF2B5EF4-FFF2-40B4-BE49-F238E27FC236}">
-                <a16:creationId xmlns:a16="http://schemas.microsoft.com/office/drawing/2014/main" id="{A555A8DF-BCB2-45B0-9427-149286D7C4D2}"/>
+                <a16:creationId xmlns:a16="http://schemas.microsoft.com/office/drawing/2014/main" id="{47BA98CB-C8ED-4D65-9A03-3B1CC6631090}"/>
               </a:ext>
             </a:extLst>
           </p:cNvPr>
@@ -3230,7 +3230,7 @@
           <p:cNvPr id="48" name="takeaway-evidence">
             <a:extLst xmlns:a="http://schemas.openxmlformats.org/drawingml/2006/main">
               <a:ext uri="{FF2B5EF4-FFF2-40B4-BE49-F238E27FC236}">
-                <a16:creationId xmlns:a16="http://schemas.microsoft.com/office/drawing/2014/main" id="{945FF7AC-18B4-4530-A1FF-5ACDBD0A1182}"/>
+                <a16:creationId xmlns:a16="http://schemas.microsoft.com/office/drawing/2014/main" id="{CC07AD53-D354-4DCB-AA56-41CAB6F9A3D4}"/>
               </a:ext>
             </a:extLst>
           </p:cNvPr>
@@ -3258,14 +3258,14 @@
           <a:lstStyle xmlns:a="http://schemas.openxmlformats.org/drawingml/2006/main"/>
           <a:p xmlns:a="http://schemas.openxmlformats.org/drawingml/2006/main">
             <a:pPr>
-              <a:defRPr sz="1875" i="1">
+              <a:defRPr sz="1875">
                 <a:solidFill>
                   <a:srgbClr val="2C8C99"/>
                 </a:solidFill>
               </a:defRPr>
             </a:pPr>
             <a:r>
-              <a:rPr sz="1875" i="1">
+              <a:rPr sz="1875">
                 <a:solidFill>
                   <a:srgbClr val="2C8C99"/>
                 </a:solidFill>
@@ -3280,7 +3280,7 @@
           <p:cNvPr id="49" name="figure-two-heading-title">
             <a:extLst xmlns:a="http://schemas.openxmlformats.org/drawingml/2006/main">
               <a:ext uri="{FF2B5EF4-FFF2-40B4-BE49-F238E27FC236}">
-                <a16:creationId xmlns:a16="http://schemas.microsoft.com/office/drawing/2014/main" id="{A8B740ED-388F-495E-9B27-71371D8C316C}"/>
+                <a16:creationId xmlns:a16="http://schemas.microsoft.com/office/drawing/2014/main" id="{943D1581-EE2E-482A-88C8-413A28B5390D}"/>
               </a:ext>
             </a:extLst>
           </p:cNvPr>
@@ -3320,7 +3320,7 @@
                   <a:srgbClr val="0F5F73"/>
                 </a:solidFill>
               </a:rPr>
-              <a:t>Primary performance</a:t>
+              <a:t>Primary result</a:t>
             </a:r>
           </a:p>
         </p:txBody>
@@ -3330,7 +3330,7 @@
           <p:cNvPr id="50" name="figure-two-heading-rule">
             <a:extLst xmlns:a="http://schemas.openxmlformats.org/drawingml/2006/main">
               <a:ext uri="{FF2B5EF4-FFF2-40B4-BE49-F238E27FC236}">
-                <a16:creationId xmlns:a16="http://schemas.microsoft.com/office/drawing/2014/main" id="{3EF34C6D-A96C-4641-BC54-0C3D55E7B3AE}"/>
+                <a16:creationId xmlns:a16="http://schemas.microsoft.com/office/drawing/2014/main" id="{D08272D6-C90D-4054-B761-218BD2C9632E}"/>
               </a:ext>
             </a:extLst>
           </p:cNvPr>
@@ -3363,7 +3363,7 @@
           <p:cNvPr id="51" name="figure-two-frame">
             <a:extLst xmlns:a="http://schemas.openxmlformats.org/drawingml/2006/main">
               <a:ext uri="{FF2B5EF4-FFF2-40B4-BE49-F238E27FC236}">
-                <a16:creationId xmlns:a16="http://schemas.microsoft.com/office/drawing/2014/main" id="{E931C31F-F3B1-4134-BA88-FA2FF58A696E}"/>
+                <a16:creationId xmlns:a16="http://schemas.microsoft.com/office/drawing/2014/main" id="{44F9C3B8-0998-471F-9F45-01AE56E6D428}"/>
               </a:ext>
             </a:extLst>
           </p:cNvPr>
@@ -3398,7 +3398,7 @@
           <p:cNvPr id="52" name="figure-two-placeholder">
             <a:extLst xmlns:a="http://schemas.openxmlformats.org/drawingml/2006/main">
               <a:ext uri="{FF2B5EF4-FFF2-40B4-BE49-F238E27FC236}">
-                <a16:creationId xmlns:a16="http://schemas.microsoft.com/office/drawing/2014/main" id="{342F7851-8CE0-447B-89CD-679895D24ABE}"/>
+                <a16:creationId xmlns:a16="http://schemas.microsoft.com/office/drawing/2014/main" id="{D72535EC-2E2E-4387-BC4A-84EED8D7406E}"/>
               </a:ext>
             </a:extLst>
           </p:cNvPr>
@@ -3433,7 +3433,7 @@
           <p:cNvPr id="53" name="figure-two-placeholder-label">
             <a:extLst xmlns:a="http://schemas.openxmlformats.org/drawingml/2006/main">
               <a:ext uri="{FF2B5EF4-FFF2-40B4-BE49-F238E27FC236}">
-                <a16:creationId xmlns:a16="http://schemas.microsoft.com/office/drawing/2014/main" id="{8A01B66D-2524-4A70-92A7-C0F0326B15F8}"/>
+                <a16:creationId xmlns:a16="http://schemas.microsoft.com/office/drawing/2014/main" id="{C1C09EEF-C2BE-4FA8-96C2-C033174E55E9}"/>
               </a:ext>
             </a:extLst>
           </p:cNvPr>
@@ -3473,7 +3473,7 @@
                   <a:srgbClr val="2C8C99"/>
                 </a:solidFill>
               </a:rPr>
-              <a:t>SCIENTIFIC FIGURE</a:t>
+              <a:t>scientific figure</a:t>
             </a:r>
           </a:p>
         </p:txBody>
@@ -3483,7 +3483,7 @@
           <p:cNvPr id="54" name="figure-two-caption">
             <a:extLst xmlns:a="http://schemas.openxmlformats.org/drawingml/2006/main">
               <a:ext uri="{FF2B5EF4-FFF2-40B4-BE49-F238E27FC236}">
-                <a16:creationId xmlns:a16="http://schemas.microsoft.com/office/drawing/2014/main" id="{85A5203E-525B-4AAB-97CD-DC972751EA38}"/>
+                <a16:creationId xmlns:a16="http://schemas.microsoft.com/office/drawing/2014/main" id="{8949739B-DD28-486D-ADD0-4A8B087709C3}"/>
               </a:ext>
             </a:extLst>
           </p:cNvPr>
@@ -3495,7 +3495,7 @@
         <p:spPr>
           <a:xfrm xmlns:a="http://schemas.openxmlformats.org/drawingml/2006/main">
             <a:off x="13754100" y="21507450"/>
-            <a:ext cx="13211175" cy="400050"/>
+            <a:ext cx="13211175" cy="314325"/>
           </a:xfrm>
           <a:prstGeom xmlns:a="http://schemas.openxmlformats.org/drawingml/2006/main" prst="rect">
             <a:avLst/>
@@ -3523,7 +3523,7 @@
                   <a:srgbClr val="102A43"/>
                 </a:solidFill>
               </a:rPr>
-              <a:t>Figure caption</a:t>
+              <a:t>Scientific Figure caption</a:t>
             </a:r>
           </a:p>
         </p:txBody>
@@ -3533,18 +3533,18 @@
           <p:cNvPr id="55" name="figure-two-source">
             <a:extLst xmlns:a="http://schemas.openxmlformats.org/drawingml/2006/main">
               <a:ext uri="{FF2B5EF4-FFF2-40B4-BE49-F238E27FC236}">
-                <a16:creationId xmlns:a16="http://schemas.microsoft.com/office/drawing/2014/main" id="{7144CE93-0022-43A1-8252-AE2CC1FF474E}"/>
-              </a:ext>
-            </a:extLst>
-          </p:cNvPr>
-          <p:cNvSpPr>
-            <a:spLocks xmlns:a="http://schemas.openxmlformats.org/drawingml/2006/main" noGrp="1"/>
-          </p:cNvSpPr>
-          <p:nvPr/>
-        </p:nvSpPr>
-        <p:spPr>
-          <a:xfrm xmlns:a="http://schemas.openxmlformats.org/drawingml/2006/main">
-            <a:off x="13754100" y="21821775"/>
+                <a16:creationId xmlns:a16="http://schemas.microsoft.com/office/drawing/2014/main" id="{BD3757B9-D6D0-4D4C-A74D-4594119E2FA7}"/>
+              </a:ext>
+            </a:extLst>
+          </p:cNvPr>
+          <p:cNvSpPr>
+            <a:spLocks xmlns:a="http://schemas.openxmlformats.org/drawingml/2006/main" noGrp="1"/>
+          </p:cNvSpPr>
+          <p:nvPr/>
+        </p:nvSpPr>
+        <p:spPr>
+          <a:xfrm xmlns:a="http://schemas.openxmlformats.org/drawingml/2006/main">
+            <a:off x="13754100" y="21831300"/>
             <a:ext cx="13211175" cy="361950"/>
           </a:xfrm>
           <a:prstGeom xmlns:a="http://schemas.openxmlformats.org/drawingml/2006/main" prst="rect">
@@ -3561,14 +3561,14 @@
           <a:lstStyle xmlns:a="http://schemas.openxmlformats.org/drawingml/2006/main"/>
           <a:p xmlns:a="http://schemas.openxmlformats.org/drawingml/2006/main">
             <a:pPr>
-              <a:defRPr sz="1875" i="1">
+              <a:defRPr sz="1875">
                 <a:solidFill>
                   <a:srgbClr val="2C8C99"/>
                 </a:solidFill>
               </a:defRPr>
             </a:pPr>
             <a:r>
-              <a:rPr sz="1875" i="1">
+              <a:rPr sz="1875">
                 <a:solidFill>
                   <a:srgbClr val="2C8C99"/>
                 </a:solidFill>
@@ -3583,7 +3583,7 @@
           <p:cNvPr id="56" name="validation-heading-title">
             <a:extLst xmlns:a="http://schemas.openxmlformats.org/drawingml/2006/main">
               <a:ext uri="{FF2B5EF4-FFF2-40B4-BE49-F238E27FC236}">
-                <a16:creationId xmlns:a16="http://schemas.microsoft.com/office/drawing/2014/main" id="{68C0F51D-7829-4F60-BB11-39D3301A1AEF}"/>
+                <a16:creationId xmlns:a16="http://schemas.microsoft.com/office/drawing/2014/main" id="{FE1EDA65-7955-4DFF-BBD1-81B527CA4985}"/>
               </a:ext>
             </a:extLst>
           </p:cNvPr>
@@ -3623,7 +3623,7 @@
                   <a:srgbClr val="0F5F73"/>
                 </a:solidFill>
               </a:rPr>
-              <a:t>Independent and external validation</a:t>
+              <a:t>Robustness and validation</a:t>
             </a:r>
           </a:p>
         </p:txBody>
@@ -3633,7 +3633,7 @@
           <p:cNvPr id="57" name="validation-heading-rule">
             <a:extLst xmlns:a="http://schemas.openxmlformats.org/drawingml/2006/main">
               <a:ext uri="{FF2B5EF4-FFF2-40B4-BE49-F238E27FC236}">
-                <a16:creationId xmlns:a16="http://schemas.microsoft.com/office/drawing/2014/main" id="{2D99CF5E-E745-45E3-AFFA-14FC638F1A98}"/>
+                <a16:creationId xmlns:a16="http://schemas.microsoft.com/office/drawing/2014/main" id="{B57A55CC-16BB-4D8F-A9DA-A429800FAAE5}"/>
               </a:ext>
             </a:extLst>
           </p:cNvPr>
@@ -3666,7 +3666,7 @@
           <p:cNvPr id="58" name="validation-panel">
             <a:extLst xmlns:a="http://schemas.openxmlformats.org/drawingml/2006/main">
               <a:ext uri="{FF2B5EF4-FFF2-40B4-BE49-F238E27FC236}">
-                <a16:creationId xmlns:a16="http://schemas.microsoft.com/office/drawing/2014/main" id="{BD039E0F-4CDF-4612-84BB-160102B25634}"/>
+                <a16:creationId xmlns:a16="http://schemas.microsoft.com/office/drawing/2014/main" id="{E4D133A7-2802-474F-9666-835733991C7B}"/>
               </a:ext>
             </a:extLst>
           </p:cNvPr>
@@ -3701,7 +3701,7 @@
           <p:cNvPr id="59" name="validation">
             <a:extLst xmlns:a="http://schemas.openxmlformats.org/drawingml/2006/main">
               <a:ext uri="{FF2B5EF4-FFF2-40B4-BE49-F238E27FC236}">
-                <a16:creationId xmlns:a16="http://schemas.microsoft.com/office/drawing/2014/main" id="{0DF65B55-0398-47A7-8F3D-1A17D9CA8978}"/>
+                <a16:creationId xmlns:a16="http://schemas.microsoft.com/office/drawing/2014/main" id="{18C752FC-8798-43AF-A881-51B9CA8E5BE8}"/>
               </a:ext>
             </a:extLst>
           </p:cNvPr>
@@ -3775,7 +3775,7 @@
                   <a:srgbClr val="102A43"/>
                 </a:solidFill>
               </a:rPr>
-              <a:t>• Negative or inconsistent findings</a:t>
+              <a:t>• Negative findings</a:t>
             </a:r>
           </a:p>
           <a:p xmlns:a="http://schemas.openxmlformats.org/drawingml/2006/main">
@@ -3802,7 +3802,7 @@
           <p:cNvPr id="60" name="validation-evidence">
             <a:extLst xmlns:a="http://schemas.openxmlformats.org/drawingml/2006/main">
               <a:ext uri="{FF2B5EF4-FFF2-40B4-BE49-F238E27FC236}">
-                <a16:creationId xmlns:a16="http://schemas.microsoft.com/office/drawing/2014/main" id="{5FE3964C-9FBF-4A0C-90B9-93D20DAEBB79}"/>
+                <a16:creationId xmlns:a16="http://schemas.microsoft.com/office/drawing/2014/main" id="{D691B81D-AA7F-4D71-83CA-19331A350774}"/>
               </a:ext>
             </a:extLst>
           </p:cNvPr>
@@ -3830,14 +3830,14 @@
           <a:lstStyle xmlns:a="http://schemas.openxmlformats.org/drawingml/2006/main"/>
           <a:p xmlns:a="http://schemas.openxmlformats.org/drawingml/2006/main">
             <a:pPr>
-              <a:defRPr sz="1875" i="1">
+              <a:defRPr sz="1875">
                 <a:solidFill>
                   <a:srgbClr val="2C8C99"/>
                 </a:solidFill>
               </a:defRPr>
             </a:pPr>
             <a:r>
-              <a:rPr sz="1875" i="1">
+              <a:rPr sz="1875">
                 <a:solidFill>
                   <a:srgbClr val="2C8C99"/>
                 </a:solidFill>
@@ -3852,7 +3852,7 @@
           <p:cNvPr id="61" name="performance-strip">
             <a:extLst xmlns:a="http://schemas.openxmlformats.org/drawingml/2006/main">
               <a:ext uri="{FF2B5EF4-FFF2-40B4-BE49-F238E27FC236}">
-                <a16:creationId xmlns:a16="http://schemas.microsoft.com/office/drawing/2014/main" id="{8A97E5A1-2BB5-4900-B476-1455BBDFE1BD}"/>
+                <a16:creationId xmlns:a16="http://schemas.microsoft.com/office/drawing/2014/main" id="{DE1851A2-0ED3-4517-BD6C-9E0D2550FEB8}"/>
               </a:ext>
             </a:extLst>
           </p:cNvPr>
@@ -3885,7 +3885,7 @@
           <p:cNvPr id="62" name="performance-strip-text">
             <a:extLst xmlns:a="http://schemas.openxmlformats.org/drawingml/2006/main">
               <a:ext uri="{FF2B5EF4-FFF2-40B4-BE49-F238E27FC236}">
-                <a16:creationId xmlns:a16="http://schemas.microsoft.com/office/drawing/2014/main" id="{2AFF452F-9063-4069-B4E6-1095CDDD6EAC}"/>
+                <a16:creationId xmlns:a16="http://schemas.microsoft.com/office/drawing/2014/main" id="{8ACFB10D-AF73-4BB3-95D0-B80282335A65}"/>
               </a:ext>
             </a:extLst>
           </p:cNvPr>
@@ -3925,7 +3925,7 @@
                   <a:srgbClr val="FFFFFF"/>
                 </a:solidFill>
               </a:rPr>
-              <a:t>Primary performance statistic or calibrated model comparison</a:t>
+              <a:t>Primary estimate · uncertainty · validation</a:t>
             </a:r>
           </a:p>
         </p:txBody>
@@ -3935,7 +3935,7 @@
           <p:cNvPr id="63" name="biology-heading-title">
             <a:extLst xmlns:a="http://schemas.openxmlformats.org/drawingml/2006/main">
               <a:ext uri="{FF2B5EF4-FFF2-40B4-BE49-F238E27FC236}">
-                <a16:creationId xmlns:a16="http://schemas.microsoft.com/office/drawing/2014/main" id="{17FF1860-879A-4967-8CB7-5AB9A0C35D4E}"/>
+                <a16:creationId xmlns:a16="http://schemas.microsoft.com/office/drawing/2014/main" id="{EA99421B-1343-4716-991B-20EC14C80C6F}"/>
               </a:ext>
             </a:extLst>
           </p:cNvPr>
@@ -3985,7 +3985,7 @@
           <p:cNvPr id="64" name="biology-heading-rule">
             <a:extLst xmlns:a="http://schemas.openxmlformats.org/drawingml/2006/main">
               <a:ext uri="{FF2B5EF4-FFF2-40B4-BE49-F238E27FC236}">
-                <a16:creationId xmlns:a16="http://schemas.microsoft.com/office/drawing/2014/main" id="{772EAE5F-03F9-4D84-BB44-59635DE4E66C}"/>
+                <a16:creationId xmlns:a16="http://schemas.microsoft.com/office/drawing/2014/main" id="{634652ED-62AA-453E-91F2-38E9DEC06154}"/>
               </a:ext>
             </a:extLst>
           </p:cNvPr>
@@ -4018,7 +4018,7 @@
           <p:cNvPr id="65" name="biology-1-value">
             <a:extLst xmlns:a="http://schemas.openxmlformats.org/drawingml/2006/main">
               <a:ext uri="{FF2B5EF4-FFF2-40B4-BE49-F238E27FC236}">
-                <a16:creationId xmlns:a16="http://schemas.microsoft.com/office/drawing/2014/main" id="{B7C4166B-238D-42D6-986B-3207131849A5}"/>
+                <a16:creationId xmlns:a16="http://schemas.microsoft.com/office/drawing/2014/main" id="{401E7E80-BEC7-4C05-8919-C40DC610FB8A}"/>
               </a:ext>
             </a:extLst>
           </p:cNvPr>
@@ -4068,18 +4068,18 @@
           <p:cNvPr id="66" name="biology-1-label">
             <a:extLst xmlns:a="http://schemas.openxmlformats.org/drawingml/2006/main">
               <a:ext uri="{FF2B5EF4-FFF2-40B4-BE49-F238E27FC236}">
-                <a16:creationId xmlns:a16="http://schemas.microsoft.com/office/drawing/2014/main" id="{5F1D5C56-7C2B-4DA9-92A7-31C3CF153144}"/>
-              </a:ext>
-            </a:extLst>
-          </p:cNvPr>
-          <p:cNvSpPr>
-            <a:spLocks xmlns:a="http://schemas.openxmlformats.org/drawingml/2006/main" noGrp="1"/>
-          </p:cNvSpPr>
-          <p:nvPr/>
-        </p:nvSpPr>
-        <p:spPr>
-          <a:xfrm xmlns:a="http://schemas.openxmlformats.org/drawingml/2006/main">
-            <a:off x="27765375" y="7353300"/>
+                <a16:creationId xmlns:a16="http://schemas.microsoft.com/office/drawing/2014/main" id="{B8C92D14-F49C-4030-94CC-FC1D4053C011}"/>
+              </a:ext>
+            </a:extLst>
+          </p:cNvPr>
+          <p:cNvSpPr>
+            <a:spLocks xmlns:a="http://schemas.openxmlformats.org/drawingml/2006/main" noGrp="1"/>
+          </p:cNvSpPr>
+          <p:nvPr/>
+        </p:nvSpPr>
+        <p:spPr>
+          <a:xfrm xmlns:a="http://schemas.openxmlformats.org/drawingml/2006/main">
+            <a:off x="27765375" y="7315200"/>
             <a:ext cx="4000500" cy="838200"/>
           </a:xfrm>
           <a:prstGeom xmlns:a="http://schemas.openxmlformats.org/drawingml/2006/main" prst="rect">
@@ -4108,7 +4108,7 @@
                   <a:srgbClr val="102A43"/>
                 </a:solidFill>
               </a:rPr>
-              <a:t>program or pathway</a:t>
+              <a:t>primary estimate</a:t>
             </a:r>
           </a:p>
         </p:txBody>
@@ -4118,7 +4118,7 @@
           <p:cNvPr id="67" name="biology-2-value">
             <a:extLst xmlns:a="http://schemas.openxmlformats.org/drawingml/2006/main">
               <a:ext uri="{FF2B5EF4-FFF2-40B4-BE49-F238E27FC236}">
-                <a16:creationId xmlns:a16="http://schemas.microsoft.com/office/drawing/2014/main" id="{8C148609-B73B-4FD0-818A-C2311F75D393}"/>
+                <a16:creationId xmlns:a16="http://schemas.microsoft.com/office/drawing/2014/main" id="{AA6FD9BF-1D1B-4075-BCA0-37B42515B87B}"/>
               </a:ext>
             </a:extLst>
           </p:cNvPr>
@@ -4158,7 +4158,7 @@
                   <a:srgbClr val="2C8C99"/>
                 </a:solidFill>
               </a:rPr>
-              <a:t>Effect</a:t>
+              <a:t>95% CI</a:t>
             </a:r>
           </a:p>
         </p:txBody>
@@ -4168,18 +4168,18 @@
           <p:cNvPr id="68" name="biology-2-label">
             <a:extLst xmlns:a="http://schemas.openxmlformats.org/drawingml/2006/main">
               <a:ext uri="{FF2B5EF4-FFF2-40B4-BE49-F238E27FC236}">
-                <a16:creationId xmlns:a16="http://schemas.microsoft.com/office/drawing/2014/main" id="{5D54BC8D-D4E8-4FC4-A438-DF0E48B9E47F}"/>
-              </a:ext>
-            </a:extLst>
-          </p:cNvPr>
-          <p:cNvSpPr>
-            <a:spLocks xmlns:a="http://schemas.openxmlformats.org/drawingml/2006/main" noGrp="1"/>
-          </p:cNvSpPr>
-          <p:nvPr/>
-        </p:nvSpPr>
-        <p:spPr>
-          <a:xfrm xmlns:a="http://schemas.openxmlformats.org/drawingml/2006/main">
-            <a:off x="32289750" y="7353300"/>
+                <a16:creationId xmlns:a16="http://schemas.microsoft.com/office/drawing/2014/main" id="{DC377F94-750B-4BB5-9675-3B2AF99BAA9B}"/>
+              </a:ext>
+            </a:extLst>
+          </p:cNvPr>
+          <p:cNvSpPr>
+            <a:spLocks xmlns:a="http://schemas.openxmlformats.org/drawingml/2006/main" noGrp="1"/>
+          </p:cNvSpPr>
+          <p:nvPr/>
+        </p:nvSpPr>
+        <p:spPr>
+          <a:xfrm xmlns:a="http://schemas.openxmlformats.org/drawingml/2006/main">
+            <a:off x="32289750" y="7315200"/>
             <a:ext cx="4000500" cy="838200"/>
           </a:xfrm>
           <a:prstGeom xmlns:a="http://schemas.openxmlformats.org/drawingml/2006/main" prst="rect">
@@ -4208,7 +4208,7 @@
                   <a:srgbClr val="102A43"/>
                 </a:solidFill>
               </a:rPr>
-              <a:t>program or pathway</a:t>
+              <a:t>uncertainty</a:t>
             </a:r>
           </a:p>
         </p:txBody>
@@ -4218,7 +4218,7 @@
           <p:cNvPr id="69" name="biology-3-value">
             <a:extLst xmlns:a="http://schemas.openxmlformats.org/drawingml/2006/main">
               <a:ext uri="{FF2B5EF4-FFF2-40B4-BE49-F238E27FC236}">
-                <a16:creationId xmlns:a16="http://schemas.microsoft.com/office/drawing/2014/main" id="{3FD63D72-5B9F-42C5-B745-BBC30E5491F1}"/>
+                <a16:creationId xmlns:a16="http://schemas.microsoft.com/office/drawing/2014/main" id="{9CDB212F-22A3-4509-852C-A3D1914E58C4}"/>
               </a:ext>
             </a:extLst>
           </p:cNvPr>
@@ -4258,7 +4258,7 @@
                   <a:srgbClr val="E8B44C"/>
                 </a:solidFill>
               </a:rPr>
-              <a:t>Effect</a:t>
+              <a:t>P</a:t>
             </a:r>
           </a:p>
         </p:txBody>
@@ -4268,18 +4268,18 @@
           <p:cNvPr id="70" name="biology-3-label">
             <a:extLst xmlns:a="http://schemas.openxmlformats.org/drawingml/2006/main">
               <a:ext uri="{FF2B5EF4-FFF2-40B4-BE49-F238E27FC236}">
-                <a16:creationId xmlns:a16="http://schemas.microsoft.com/office/drawing/2014/main" id="{AF56853A-F9A5-4888-9E9D-F3E1A668A549}"/>
-              </a:ext>
-            </a:extLst>
-          </p:cNvPr>
-          <p:cNvSpPr>
-            <a:spLocks xmlns:a="http://schemas.openxmlformats.org/drawingml/2006/main" noGrp="1"/>
-          </p:cNvSpPr>
-          <p:nvPr/>
-        </p:nvSpPr>
-        <p:spPr>
-          <a:xfrm xmlns:a="http://schemas.openxmlformats.org/drawingml/2006/main">
-            <a:off x="36814125" y="7353300"/>
+                <a16:creationId xmlns:a16="http://schemas.microsoft.com/office/drawing/2014/main" id="{13006DB5-114C-4635-B85B-A499265E5F54}"/>
+              </a:ext>
+            </a:extLst>
+          </p:cNvPr>
+          <p:cNvSpPr>
+            <a:spLocks xmlns:a="http://schemas.openxmlformats.org/drawingml/2006/main" noGrp="1"/>
+          </p:cNvSpPr>
+          <p:nvPr/>
+        </p:nvSpPr>
+        <p:spPr>
+          <a:xfrm xmlns:a="http://schemas.openxmlformats.org/drawingml/2006/main">
+            <a:off x="36814125" y="7315200"/>
             <a:ext cx="4000500" cy="838200"/>
           </a:xfrm>
           <a:prstGeom xmlns:a="http://schemas.openxmlformats.org/drawingml/2006/main" prst="rect">
@@ -4308,7 +4308,7 @@
                   <a:srgbClr val="102A43"/>
                 </a:solidFill>
               </a:rPr>
-              <a:t>program or pathway</a:t>
+              <a:t>robustness</a:t>
             </a:r>
           </a:p>
         </p:txBody>
@@ -4318,7 +4318,7 @@
           <p:cNvPr id="71" name="biology-evidence">
             <a:extLst xmlns:a="http://schemas.openxmlformats.org/drawingml/2006/main">
               <a:ext uri="{FF2B5EF4-FFF2-40B4-BE49-F238E27FC236}">
-                <a16:creationId xmlns:a16="http://schemas.microsoft.com/office/drawing/2014/main" id="{6DC9665A-CD80-44C7-9AFF-5CC2F8AD5624}"/>
+                <a16:creationId xmlns:a16="http://schemas.microsoft.com/office/drawing/2014/main" id="{7BB8293C-7397-45E7-9707-EE7647578087}"/>
               </a:ext>
             </a:extLst>
           </p:cNvPr>
@@ -4346,19 +4346,19 @@
           <a:lstStyle xmlns:a="http://schemas.openxmlformats.org/drawingml/2006/main"/>
           <a:p xmlns:a="http://schemas.openxmlformats.org/drawingml/2006/main">
             <a:pPr>
-              <a:defRPr sz="1875" i="1">
+              <a:defRPr sz="1875">
                 <a:solidFill>
                   <a:srgbClr val="2C8C99"/>
                 </a:solidFill>
               </a:defRPr>
             </a:pPr>
             <a:r>
-              <a:rPr sz="1875" i="1">
+              <a:rPr sz="1875">
                 <a:solidFill>
                   <a:srgbClr val="2C8C99"/>
                 </a:solidFill>
               </a:rPr>
-              <a:t>Evidence: biological analysis</a:t>
+              <a:t>Evidence: supporting analysis</a:t>
             </a:r>
           </a:p>
         </p:txBody>
@@ -4368,7 +4368,7 @@
           <p:cNvPr id="72" name="figure-three-frame">
             <a:extLst xmlns:a="http://schemas.openxmlformats.org/drawingml/2006/main">
               <a:ext uri="{FF2B5EF4-FFF2-40B4-BE49-F238E27FC236}">
-                <a16:creationId xmlns:a16="http://schemas.microsoft.com/office/drawing/2014/main" id="{875CF1E9-97BE-4D2C-ABCE-BDADF0D82D9D}"/>
+                <a16:creationId xmlns:a16="http://schemas.microsoft.com/office/drawing/2014/main" id="{E20899C6-B8F1-40AF-AA47-89F116161BC4}"/>
               </a:ext>
             </a:extLst>
           </p:cNvPr>
@@ -4403,7 +4403,7 @@
           <p:cNvPr id="73" name="figure-three-placeholder">
             <a:extLst xmlns:a="http://schemas.openxmlformats.org/drawingml/2006/main">
               <a:ext uri="{FF2B5EF4-FFF2-40B4-BE49-F238E27FC236}">
-                <a16:creationId xmlns:a16="http://schemas.microsoft.com/office/drawing/2014/main" id="{16AE7DEE-E309-464D-9EC7-69B47D4D7137}"/>
+                <a16:creationId xmlns:a16="http://schemas.microsoft.com/office/drawing/2014/main" id="{34DABA95-2286-485B-B898-1381A3B9DF39}"/>
               </a:ext>
             </a:extLst>
           </p:cNvPr>
@@ -4438,7 +4438,7 @@
           <p:cNvPr id="74" name="figure-three-placeholder-label">
             <a:extLst xmlns:a="http://schemas.openxmlformats.org/drawingml/2006/main">
               <a:ext uri="{FF2B5EF4-FFF2-40B4-BE49-F238E27FC236}">
-                <a16:creationId xmlns:a16="http://schemas.microsoft.com/office/drawing/2014/main" id="{3C8C8368-0F3C-4D62-BCC6-CC1ABEAE4C5A}"/>
+                <a16:creationId xmlns:a16="http://schemas.microsoft.com/office/drawing/2014/main" id="{CAA787F1-2059-432E-9358-A6F1E7C15FD0}"/>
               </a:ext>
             </a:extLst>
           </p:cNvPr>
@@ -4478,7 +4478,7 @@
                   <a:srgbClr val="2C8C99"/>
                 </a:solidFill>
               </a:rPr>
-              <a:t>SCIENTIFIC FIGURE</a:t>
+              <a:t>scientific figure</a:t>
             </a:r>
           </a:p>
         </p:txBody>
@@ -4488,7 +4488,7 @@
           <p:cNvPr id="75" name="figure-three-caption">
             <a:extLst xmlns:a="http://schemas.openxmlformats.org/drawingml/2006/main">
               <a:ext uri="{FF2B5EF4-FFF2-40B4-BE49-F238E27FC236}">
-                <a16:creationId xmlns:a16="http://schemas.microsoft.com/office/drawing/2014/main" id="{0A5D5221-E6B1-4C6F-8412-C92D431A429D}"/>
+                <a16:creationId xmlns:a16="http://schemas.microsoft.com/office/drawing/2014/main" id="{F77185A9-0B18-4877-A2DE-EEBF516F4C12}"/>
               </a:ext>
             </a:extLst>
           </p:cNvPr>
@@ -4500,7 +4500,7 @@
         <p:spPr>
           <a:xfrm xmlns:a="http://schemas.openxmlformats.org/drawingml/2006/main">
             <a:off x="27993975" y="15363825"/>
-            <a:ext cx="13249275" cy="400050"/>
+            <a:ext cx="13249275" cy="314325"/>
           </a:xfrm>
           <a:prstGeom xmlns:a="http://schemas.openxmlformats.org/drawingml/2006/main" prst="rect">
             <a:avLst/>
@@ -4528,7 +4528,7 @@
                   <a:srgbClr val="102A43"/>
                 </a:solidFill>
               </a:rPr>
-              <a:t>Figure caption</a:t>
+              <a:t>Scientific Figure caption</a:t>
             </a:r>
           </a:p>
         </p:txBody>
@@ -4538,18 +4538,18 @@
           <p:cNvPr id="76" name="figure-three-source">
             <a:extLst xmlns:a="http://schemas.openxmlformats.org/drawingml/2006/main">
               <a:ext uri="{FF2B5EF4-FFF2-40B4-BE49-F238E27FC236}">
-                <a16:creationId xmlns:a16="http://schemas.microsoft.com/office/drawing/2014/main" id="{3C773945-6858-4D81-9A05-332785EC685C}"/>
-              </a:ext>
-            </a:extLst>
-          </p:cNvPr>
-          <p:cNvSpPr>
-            <a:spLocks xmlns:a="http://schemas.openxmlformats.org/drawingml/2006/main" noGrp="1"/>
-          </p:cNvSpPr>
-          <p:nvPr/>
-        </p:nvSpPr>
-        <p:spPr>
-          <a:xfrm xmlns:a="http://schemas.openxmlformats.org/drawingml/2006/main">
-            <a:off x="27993975" y="15678150"/>
+                <a16:creationId xmlns:a16="http://schemas.microsoft.com/office/drawing/2014/main" id="{DF046C1D-F2AE-4D6E-BC75-936C8D9AD06F}"/>
+              </a:ext>
+            </a:extLst>
+          </p:cNvPr>
+          <p:cNvSpPr>
+            <a:spLocks xmlns:a="http://schemas.openxmlformats.org/drawingml/2006/main" noGrp="1"/>
+          </p:cNvSpPr>
+          <p:nvPr/>
+        </p:nvSpPr>
+        <p:spPr>
+          <a:xfrm xmlns:a="http://schemas.openxmlformats.org/drawingml/2006/main">
+            <a:off x="27993975" y="15687675"/>
             <a:ext cx="13249275" cy="361950"/>
           </a:xfrm>
           <a:prstGeom xmlns:a="http://schemas.openxmlformats.org/drawingml/2006/main" prst="rect">
@@ -4566,14 +4566,14 @@
           <a:lstStyle xmlns:a="http://schemas.openxmlformats.org/drawingml/2006/main"/>
           <a:p xmlns:a="http://schemas.openxmlformats.org/drawingml/2006/main">
             <a:pPr>
-              <a:defRPr sz="1875" i="1">
+              <a:defRPr sz="1875">
                 <a:solidFill>
                   <a:srgbClr val="2C8C99"/>
                 </a:solidFill>
               </a:defRPr>
             </a:pPr>
             <a:r>
-              <a:rPr sz="1875" i="1">
+              <a:rPr sz="1875">
                 <a:solidFill>
                   <a:srgbClr val="2C8C99"/>
                 </a:solidFill>
@@ -4588,7 +4588,7 @@
           <p:cNvPr id="77" name="validation-visual-heading-title">
             <a:extLst xmlns:a="http://schemas.openxmlformats.org/drawingml/2006/main">
               <a:ext uri="{FF2B5EF4-FFF2-40B4-BE49-F238E27FC236}">
-                <a16:creationId xmlns:a16="http://schemas.microsoft.com/office/drawing/2014/main" id="{D47C5BEB-5139-4064-BA20-3D336005AFA7}"/>
+                <a16:creationId xmlns:a16="http://schemas.microsoft.com/office/drawing/2014/main" id="{5BD50F88-10DB-4F5E-BFA0-4486042988D9}"/>
               </a:ext>
             </a:extLst>
           </p:cNvPr>
@@ -4638,7 +4638,7 @@
           <p:cNvPr id="78" name="validation-visual-heading-rule">
             <a:extLst xmlns:a="http://schemas.openxmlformats.org/drawingml/2006/main">
               <a:ext uri="{FF2B5EF4-FFF2-40B4-BE49-F238E27FC236}">
-                <a16:creationId xmlns:a16="http://schemas.microsoft.com/office/drawing/2014/main" id="{D3747B2E-C2FD-4CDA-8E2A-B98D5FAB2D18}"/>
+                <a16:creationId xmlns:a16="http://schemas.microsoft.com/office/drawing/2014/main" id="{51F03A87-6C97-4DAA-8B0E-21244887A094}"/>
               </a:ext>
             </a:extLst>
           </p:cNvPr>
@@ -4671,7 +4671,7 @@
           <p:cNvPr id="79" name="figure-four-frame">
             <a:extLst xmlns:a="http://schemas.openxmlformats.org/drawingml/2006/main">
               <a:ext uri="{FF2B5EF4-FFF2-40B4-BE49-F238E27FC236}">
-                <a16:creationId xmlns:a16="http://schemas.microsoft.com/office/drawing/2014/main" id="{105DECA0-8EF4-43AA-A17D-16B97C4B6AE0}"/>
+                <a16:creationId xmlns:a16="http://schemas.microsoft.com/office/drawing/2014/main" id="{563E22B7-2E92-4EDA-ACAC-105A50F82748}"/>
               </a:ext>
             </a:extLst>
           </p:cNvPr>
@@ -4706,7 +4706,7 @@
           <p:cNvPr id="80" name="figure-four-placeholder">
             <a:extLst xmlns:a="http://schemas.openxmlformats.org/drawingml/2006/main">
               <a:ext uri="{FF2B5EF4-FFF2-40B4-BE49-F238E27FC236}">
-                <a16:creationId xmlns:a16="http://schemas.microsoft.com/office/drawing/2014/main" id="{BA6191A1-8A8F-488D-A2DA-B29F525FD9D9}"/>
+                <a16:creationId xmlns:a16="http://schemas.microsoft.com/office/drawing/2014/main" id="{57225AA9-5849-4F21-93A9-A2B9F85A12A5}"/>
               </a:ext>
             </a:extLst>
           </p:cNvPr>
@@ -4741,7 +4741,7 @@
           <p:cNvPr id="81" name="figure-four-placeholder-label">
             <a:extLst xmlns:a="http://schemas.openxmlformats.org/drawingml/2006/main">
               <a:ext uri="{FF2B5EF4-FFF2-40B4-BE49-F238E27FC236}">
-                <a16:creationId xmlns:a16="http://schemas.microsoft.com/office/drawing/2014/main" id="{DA75D3BD-B429-4F45-BA4A-03DD35D8866A}"/>
+                <a16:creationId xmlns:a16="http://schemas.microsoft.com/office/drawing/2014/main" id="{AA8BBC2F-0B0C-44AF-8C21-B223A69EAB81}"/>
               </a:ext>
             </a:extLst>
           </p:cNvPr>
@@ -4781,7 +4781,7 @@
                   <a:srgbClr val="2C8C99"/>
                 </a:solidFill>
               </a:rPr>
-              <a:t>SCIENTIFIC FIGURE</a:t>
+              <a:t>scientific figure</a:t>
             </a:r>
           </a:p>
         </p:txBody>
@@ -4791,7 +4791,7 @@
           <p:cNvPr id="82" name="figure-four-caption">
             <a:extLst xmlns:a="http://schemas.openxmlformats.org/drawingml/2006/main">
               <a:ext uri="{FF2B5EF4-FFF2-40B4-BE49-F238E27FC236}">
-                <a16:creationId xmlns:a16="http://schemas.microsoft.com/office/drawing/2014/main" id="{7C94B568-3AFC-427C-A949-A914A7FFBD3F}"/>
+                <a16:creationId xmlns:a16="http://schemas.microsoft.com/office/drawing/2014/main" id="{645336D8-1BDA-47B0-932C-CB08D3B6BE94}"/>
               </a:ext>
             </a:extLst>
           </p:cNvPr>
@@ -4803,7 +4803,7 @@
         <p:spPr>
           <a:xfrm xmlns:a="http://schemas.openxmlformats.org/drawingml/2006/main">
             <a:off x="27993975" y="23841075"/>
-            <a:ext cx="13249275" cy="400050"/>
+            <a:ext cx="13249275" cy="314325"/>
           </a:xfrm>
           <a:prstGeom xmlns:a="http://schemas.openxmlformats.org/drawingml/2006/main" prst="rect">
             <a:avLst/>
@@ -4831,7 +4831,7 @@
                   <a:srgbClr val="102A43"/>
                 </a:solidFill>
               </a:rPr>
-              <a:t>Figure caption</a:t>
+              <a:t>Scientific Figure caption</a:t>
             </a:r>
           </a:p>
         </p:txBody>
@@ -4841,18 +4841,18 @@
           <p:cNvPr id="83" name="figure-four-source">
             <a:extLst xmlns:a="http://schemas.openxmlformats.org/drawingml/2006/main">
               <a:ext uri="{FF2B5EF4-FFF2-40B4-BE49-F238E27FC236}">
-                <a16:creationId xmlns:a16="http://schemas.microsoft.com/office/drawing/2014/main" id="{420C1B44-78BA-4AC0-8AD5-F83445424025}"/>
-              </a:ext>
-            </a:extLst>
-          </p:cNvPr>
-          <p:cNvSpPr>
-            <a:spLocks xmlns:a="http://schemas.openxmlformats.org/drawingml/2006/main" noGrp="1"/>
-          </p:cNvSpPr>
-          <p:nvPr/>
-        </p:nvSpPr>
-        <p:spPr>
-          <a:xfrm xmlns:a="http://schemas.openxmlformats.org/drawingml/2006/main">
-            <a:off x="27993975" y="24155400"/>
+                <a16:creationId xmlns:a16="http://schemas.microsoft.com/office/drawing/2014/main" id="{163661C4-F91D-4F1D-9A03-23D57CBEFD84}"/>
+              </a:ext>
+            </a:extLst>
+          </p:cNvPr>
+          <p:cNvSpPr>
+            <a:spLocks xmlns:a="http://schemas.openxmlformats.org/drawingml/2006/main" noGrp="1"/>
+          </p:cNvSpPr>
+          <p:nvPr/>
+        </p:nvSpPr>
+        <p:spPr>
+          <a:xfrm xmlns:a="http://schemas.openxmlformats.org/drawingml/2006/main">
+            <a:off x="27993975" y="24164925"/>
             <a:ext cx="13249275" cy="361950"/>
           </a:xfrm>
           <a:prstGeom xmlns:a="http://schemas.openxmlformats.org/drawingml/2006/main" prst="rect">
@@ -4869,14 +4869,14 @@
           <a:lstStyle xmlns:a="http://schemas.openxmlformats.org/drawingml/2006/main"/>
           <a:p xmlns:a="http://schemas.openxmlformats.org/drawingml/2006/main">
             <a:pPr>
-              <a:defRPr sz="1875" i="1">
+              <a:defRPr sz="1875">
                 <a:solidFill>
                   <a:srgbClr val="2C8C99"/>
                 </a:solidFill>
               </a:defRPr>
             </a:pPr>
             <a:r>
-              <a:rPr sz="1875" i="1">
+              <a:rPr sz="1875">
                 <a:solidFill>
                   <a:srgbClr val="2C8C99"/>
                 </a:solidFill>
@@ -4891,7 +4891,7 @@
           <p:cNvPr id="84" name="conclusion-heading-title">
             <a:extLst xmlns:a="http://schemas.openxmlformats.org/drawingml/2006/main">
               <a:ext uri="{FF2B5EF4-FFF2-40B4-BE49-F238E27FC236}">
-                <a16:creationId xmlns:a16="http://schemas.microsoft.com/office/drawing/2014/main" id="{3F6BD872-FC77-42C7-8411-74DF12D65717}"/>
+                <a16:creationId xmlns:a16="http://schemas.microsoft.com/office/drawing/2014/main" id="{6A18CE07-D9FC-4A1B-A999-F4C62921FC36}"/>
               </a:ext>
             </a:extLst>
           </p:cNvPr>
@@ -4941,7 +4941,7 @@
           <p:cNvPr id="85" name="conclusion-heading-rule">
             <a:extLst xmlns:a="http://schemas.openxmlformats.org/drawingml/2006/main">
               <a:ext uri="{FF2B5EF4-FFF2-40B4-BE49-F238E27FC236}">
-                <a16:creationId xmlns:a16="http://schemas.microsoft.com/office/drawing/2014/main" id="{117CF0E6-CF9E-4508-8D89-319999711640}"/>
+                <a16:creationId xmlns:a16="http://schemas.microsoft.com/office/drawing/2014/main" id="{F72F056C-EEFE-4A9E-ADD4-08D43C7AADD7}"/>
               </a:ext>
             </a:extLst>
           </p:cNvPr>
@@ -4974,7 +4974,7 @@
           <p:cNvPr id="86" name="conclusion-panel">
             <a:extLst xmlns:a="http://schemas.openxmlformats.org/drawingml/2006/main">
               <a:ext uri="{FF2B5EF4-FFF2-40B4-BE49-F238E27FC236}">
-                <a16:creationId xmlns:a16="http://schemas.microsoft.com/office/drawing/2014/main" id="{AE250102-07D1-45A0-A146-02068FB4FFC9}"/>
+                <a16:creationId xmlns:a16="http://schemas.microsoft.com/office/drawing/2014/main" id="{9877FC49-BA3A-4874-9734-7933C3ED7180}"/>
               </a:ext>
             </a:extLst>
           </p:cNvPr>
@@ -5009,7 +5009,7 @@
           <p:cNvPr id="87" name="conclusion">
             <a:extLst xmlns:a="http://schemas.openxmlformats.org/drawingml/2006/main">
               <a:ext uri="{FF2B5EF4-FFF2-40B4-BE49-F238E27FC236}">
-                <a16:creationId xmlns:a16="http://schemas.microsoft.com/office/drawing/2014/main" id="{183E57D8-4E8A-4AEB-A789-A7AF40FA843F}"/>
+                <a16:creationId xmlns:a16="http://schemas.microsoft.com/office/drawing/2014/main" id="{5255D97C-3B9B-436F-B0E8-755514C77C64}"/>
               </a:ext>
             </a:extLst>
           </p:cNvPr>
@@ -5059,7 +5059,7 @@
           <p:cNvPr id="88" name="conclusion-evidence">
             <a:extLst xmlns:a="http://schemas.openxmlformats.org/drawingml/2006/main">
               <a:ext uri="{FF2B5EF4-FFF2-40B4-BE49-F238E27FC236}">
-                <a16:creationId xmlns:a16="http://schemas.microsoft.com/office/drawing/2014/main" id="{E9EA788B-9DDB-4925-85CD-BD2AA85E8DF5}"/>
+                <a16:creationId xmlns:a16="http://schemas.microsoft.com/office/drawing/2014/main" id="{B55F38AB-FDF7-4764-978F-C12C734B31B0}"/>
               </a:ext>
             </a:extLst>
           </p:cNvPr>
@@ -5087,14 +5087,14 @@
           <a:lstStyle xmlns:a="http://schemas.openxmlformats.org/drawingml/2006/main"/>
           <a:p xmlns:a="http://schemas.openxmlformats.org/drawingml/2006/main">
             <a:pPr>
-              <a:defRPr sz="1875" i="1">
+              <a:defRPr sz="1875">
                 <a:solidFill>
                   <a:srgbClr val="2C8C99"/>
                 </a:solidFill>
               </a:defRPr>
             </a:pPr>
             <a:r>
-              <a:rPr sz="1875" i="1">
+              <a:rPr sz="1875">
                 <a:solidFill>
                   <a:srgbClr val="2C8C99"/>
                 </a:solidFill>
@@ -5109,7 +5109,7 @@
           <p:cNvPr id="89" name="footer-band">
             <a:extLst xmlns:a="http://schemas.openxmlformats.org/drawingml/2006/main">
               <a:ext uri="{FF2B5EF4-FFF2-40B4-BE49-F238E27FC236}">
-                <a16:creationId xmlns:a16="http://schemas.microsoft.com/office/drawing/2014/main" id="{46FC9100-D5BF-4301-824B-B18090E613F1}"/>
+                <a16:creationId xmlns:a16="http://schemas.microsoft.com/office/drawing/2014/main" id="{29AD06EA-C229-499E-AF57-83DCFB745577}"/>
               </a:ext>
             </a:extLst>
           </p:cNvPr>
@@ -5142,7 +5142,7 @@
           <p:cNvPr id="90" name="footer-source">
             <a:extLst xmlns:a="http://schemas.openxmlformats.org/drawingml/2006/main">
               <a:ext uri="{FF2B5EF4-FFF2-40B4-BE49-F238E27FC236}">
-                <a16:creationId xmlns:a16="http://schemas.microsoft.com/office/drawing/2014/main" id="{F3CE12C1-90D6-4356-82C3-2F295D7557E2}"/>
+                <a16:creationId xmlns:a16="http://schemas.microsoft.com/office/drawing/2014/main" id="{2CAF6C88-A87C-4009-90C1-F3462F242F80}"/>
               </a:ext>
             </a:extLst>
           </p:cNvPr>
@@ -5154,7 +5154,7 @@
         <p:spPr>
           <a:xfrm xmlns:a="http://schemas.openxmlformats.org/drawingml/2006/main">
             <a:off x="1333500" y="29594175"/>
-            <a:ext cx="28575000" cy="400050"/>
+            <a:ext cx="19145250" cy="400050"/>
           </a:xfrm>
           <a:prstGeom xmlns:a="http://schemas.openxmlformats.org/drawingml/2006/main" prst="rect">
             <a:avLst/>
@@ -5192,19 +5192,19 @@
           <p:cNvPr id="91" name="footer-status">
             <a:extLst xmlns:a="http://schemas.openxmlformats.org/drawingml/2006/main">
               <a:ext uri="{FF2B5EF4-FFF2-40B4-BE49-F238E27FC236}">
-                <a16:creationId xmlns:a16="http://schemas.microsoft.com/office/drawing/2014/main" id="{2519F68E-3F02-4C18-B1C3-3DD83483D43F}"/>
-              </a:ext>
-            </a:extLst>
-          </p:cNvPr>
-          <p:cNvSpPr>
-            <a:spLocks xmlns:a="http://schemas.openxmlformats.org/drawingml/2006/main" noGrp="1"/>
-          </p:cNvSpPr>
-          <p:nvPr/>
-        </p:nvSpPr>
-        <p:spPr>
-          <a:xfrm xmlns:a="http://schemas.openxmlformats.org/drawingml/2006/main">
-            <a:off x="29718000" y="29594175"/>
-            <a:ext cx="11715750" cy="400050"/>
+                <a16:creationId xmlns:a16="http://schemas.microsoft.com/office/drawing/2014/main" id="{F4946043-8343-4EE1-92B1-9D02A77764F8}"/>
+              </a:ext>
+            </a:extLst>
+          </p:cNvPr>
+          <p:cNvSpPr>
+            <a:spLocks xmlns:a="http://schemas.openxmlformats.org/drawingml/2006/main" noGrp="1"/>
+          </p:cNvSpPr>
+          <p:nvPr/>
+        </p:nvSpPr>
+        <p:spPr>
+          <a:xfrm xmlns:a="http://schemas.openxmlformats.org/drawingml/2006/main">
+            <a:off x="20764500" y="29594175"/>
+            <a:ext cx="8667750" cy="400050"/>
           </a:xfrm>
           <a:prstGeom xmlns:a="http://schemas.openxmlformats.org/drawingml/2006/main" prst="rect">
             <a:avLst/>
@@ -5220,19 +5220,73 @@
           <a:lstStyle xmlns:a="http://schemas.openxmlformats.org/drawingml/2006/main"/>
           <a:p xmlns:a="http://schemas.openxmlformats.org/drawingml/2006/main">
             <a:pPr algn="r">
-              <a:defRPr sz="1875" b="1">
+              <a:defRPr sz="1800" b="1">
                 <a:solidFill>
                   <a:srgbClr val="E8B44C"/>
                 </a:solidFill>
               </a:defRPr>
             </a:pPr>
             <a:r>
-              <a:rPr sz="1875" b="1">
+              <a:rPr sz="1800" b="1">
                 <a:solidFill>
                   <a:srgbClr val="E8B44C"/>
                 </a:solidFill>
               </a:rPr>
-              <a:t>Approval status · scientific colors locked</a:t>
+              <a:t>Approvals current · scientific colors locked</a:t>
+            </a:r>
+          </a:p>
+        </p:txBody>
+      </p:sp>
+      <p:sp>
+        <p:nvSpPr>
+          <p:cNvPr id="92" name="POSTEX_PROVENANCE_MARK">
+            <a:extLst xmlns:a="http://schemas.openxmlformats.org/drawingml/2006/main">
+              <a:ext uri="{FF2B5EF4-FFF2-40B4-BE49-F238E27FC236}">
+                <a16:creationId xmlns:a16="http://schemas.microsoft.com/office/drawing/2014/main" id="{0E3D36BE-813F-49D9-9E92-4EA1ED67335A}"/>
+              </a:ext>
+            </a:extLst>
+          </p:cNvPr>
+          <p:cNvSpPr>
+            <a:spLocks xmlns:a="http://schemas.openxmlformats.org/drawingml/2006/main" noGrp="1"/>
+          </p:cNvSpPr>
+          <p:nvPr/>
+        </p:nvSpPr>
+        <p:spPr>
+          <a:xfrm xmlns:a="http://schemas.openxmlformats.org/drawingml/2006/main">
+            <a:off x="30289500" y="29594175"/>
+            <a:ext cx="11144250" cy="400050"/>
+          </a:xfrm>
+          <a:prstGeom xmlns:a="http://schemas.openxmlformats.org/drawingml/2006/main" prst="rect">
+            <a:avLst/>
+          </a:prstGeom>
+          <a:noFill xmlns:a="http://schemas.openxmlformats.org/drawingml/2006/main"/>
+          <a:ln xmlns:a="http://schemas.openxmlformats.org/drawingml/2006/main" w="0">
+            <a:noFill/>
+            <a:prstDash val="solid"/>
+          </a:ln>
+        </p:spPr>
+        <p:txBody>
+          <a:bodyPr xmlns:a="http://schemas.openxmlformats.org/drawingml/2006/main"/>
+          <a:lstStyle xmlns:a="http://schemas.openxmlformats.org/drawingml/2006/main"/>
+          <a:p xmlns:a="http://schemas.openxmlformats.org/drawingml/2006/main">
+            <a:pPr algn="r">
+              <a:defRPr sz="1800" b="1">
+                <a:solidFill>
+                  <a:srgbClr val="FFFFFF">
+                    <a:alpha val="38000"/>
+                  </a:srgbClr>
+                </a:solidFill>
+              </a:defRPr>
+            </a:pPr>
+            <a:r>
+              <a:rPr sz="1800" b="1">
+                <a:solidFill>
+                  <a:srgbClr val="FFFFFF">
+                    <a:alpha val="38000"/>
+                  </a:srgbClr>
+                </a:solidFill>
+              </a:rPr>
+              <a:t>Made with PostEx™ · PX-00000000</a:t>
             </a:r>
           </a:p>
         </p:txBody>
@@ -5240,7 +5294,7 @@
     </p:spTree>
     <p:extLst>
       <p:ext uri="{BB962C8B-B14F-4D97-AF65-F5344CB8AC3E}">
-        <p14:creationId xmlns:p14="http://schemas.microsoft.com/office/powerpoint/2010/main" val="1451540053"/>
+        <p14:creationId xmlns:p14="http://schemas.microsoft.com/office/powerpoint/2010/main" val="461850941"/>
       </p:ext>
     </p:extLst>
   </p:cSld>
